--- a/presentation.pptx
+++ b/presentation.pptx
@@ -4,6 +4,9 @@
   <p:sldMasterIdLst>
     <p:sldMasterId id="2147483648" r:id="rId1"/>
   </p:sldMasterIdLst>
+  <p:notesMasterIdLst>
+    <p:notesMasterId r:id="rId8"/>
+  </p:notesMasterIdLst>
   <p:sldIdLst>
     <p:sldId id="256" r:id="rId7"/>
     <p:sldId id="257" r:id="rId9"/>
@@ -5126,7 +5129,7 @@
 </file>
 
 <file path=ppt/slides/slide1.xml><?xml version="1.0" encoding="utf-8"?>
-<p:sld xmlns:a="http://schemas.openxmlformats.org/drawingml/2006/main" xmlns:p="http://schemas.openxmlformats.org/presentationml/2006/main" xmlns:r="http://schemas.openxmlformats.org/officeDocument/2006/relationships">
+<p:sld xmlns:a="http://schemas.openxmlformats.org/drawingml/2006/main" xmlns:p="http://schemas.openxmlformats.org/presentationml/2006/main" xmlns:r="http://schemas.openxmlformats.org/officeDocument/2006/relationships" xmlns:m="http://schemas.openxmlformats.org/officeDocument/2006/math" xmlns:a14="http://schemas.microsoft.com/office/drawing/2010/main" xmlns:mc="http://schemas.openxmlformats.org/markup-compatibility/2006" xmlns:w="http://schemas.openxmlformats.org/wordprocessingml/2006/main" mc:Ignorable="a14">
   <p:cSld>
     <p:spTree>
       <p:nvGrpSpPr>
@@ -5164,7 +5167,7 @@
           <a:fillRef idx="3">
             <a:schemeClr val="accent1"/>
           </a:fillRef>
-          <a:effectRef idx="2">
+          <a:effectRef idx="0">
             <a:schemeClr val="accent1"/>
           </a:effectRef>
           <a:fontRef idx="minor">
@@ -5176,6 +5179,7 @@
           <a:lstStyle/>
           <a:p>
             <a:pPr algn="ctr"/>
+            <a:endParaRPr lang="en-US"/>
           </a:p>
         </p:txBody>
       </p:sp>
@@ -5208,7 +5212,7 @@
           <a:fillRef idx="3">
             <a:schemeClr val="accent1"/>
           </a:fillRef>
-          <a:effectRef idx="2">
+          <a:effectRef idx="0">
             <a:schemeClr val="accent1"/>
           </a:effectRef>
           <a:fontRef idx="minor">
@@ -5220,6 +5224,7 @@
           <a:lstStyle/>
           <a:p>
             <a:pPr algn="ctr"/>
+            <a:endParaRPr lang="en-US"/>
           </a:p>
         </p:txBody>
       </p:sp>
@@ -5252,7 +5257,7 @@
           <a:fillRef idx="3">
             <a:schemeClr val="accent1"/>
           </a:fillRef>
-          <a:effectRef idx="2">
+          <a:effectRef idx="0">
             <a:schemeClr val="accent1"/>
           </a:effectRef>
           <a:fontRef idx="minor">
@@ -5264,6 +5269,7 @@
           <a:lstStyle/>
           <a:p>
             <a:pPr algn="ctr"/>
+            <a:endParaRPr lang="en-US"/>
           </a:p>
         </p:txBody>
       </p:sp>
@@ -5296,7 +5302,7 @@
           <a:fillRef idx="3">
             <a:schemeClr val="accent1"/>
           </a:fillRef>
-          <a:effectRef idx="2">
+          <a:effectRef idx="0">
             <a:schemeClr val="accent1"/>
           </a:effectRef>
           <a:fontRef idx="minor">
@@ -5308,6 +5314,7 @@
           <a:lstStyle/>
           <a:p>
             <a:pPr algn="ctr"/>
+            <a:endParaRPr lang="en-US"/>
           </a:p>
         </p:txBody>
       </p:sp>
@@ -5519,7 +5526,7 @@
           <a:fillRef idx="3">
             <a:schemeClr val="accent1"/>
           </a:fillRef>
-          <a:effectRef idx="2">
+          <a:effectRef idx="0">
             <a:schemeClr val="accent1"/>
           </a:effectRef>
           <a:fontRef idx="minor">
@@ -5531,6 +5538,7 @@
           <a:lstStyle/>
           <a:p>
             <a:pPr algn="ctr"/>
+            <a:endParaRPr lang="en-US"/>
           </a:p>
         </p:txBody>
       </p:sp>
@@ -5606,7 +5614,7 @@
           <a:fillRef idx="3">
             <a:schemeClr val="accent1"/>
           </a:fillRef>
-          <a:effectRef idx="2">
+          <a:effectRef idx="0">
             <a:schemeClr val="accent1"/>
           </a:effectRef>
           <a:fontRef idx="minor">
@@ -5618,6 +5626,7 @@
           <a:lstStyle/>
           <a:p>
             <a:pPr algn="ctr"/>
+            <a:endParaRPr lang="en-US"/>
           </a:p>
         </p:txBody>
       </p:sp>
@@ -5693,7 +5702,7 @@
           <a:fillRef idx="3">
             <a:schemeClr val="accent1"/>
           </a:fillRef>
-          <a:effectRef idx="2">
+          <a:effectRef idx="0">
             <a:schemeClr val="accent1"/>
           </a:effectRef>
           <a:fontRef idx="minor">
@@ -5705,6 +5714,7 @@
           <a:lstStyle/>
           <a:p>
             <a:pPr algn="ctr"/>
+            <a:endParaRPr lang="en-US"/>
           </a:p>
         </p:txBody>
       </p:sp>
@@ -5819,7 +5829,7 @@
           <a:fillRef idx="3">
             <a:schemeClr val="accent1"/>
           </a:fillRef>
-          <a:effectRef idx="2">
+          <a:effectRef idx="0">
             <a:schemeClr val="accent1"/>
           </a:effectRef>
           <a:fontRef idx="minor">
@@ -5831,6 +5841,7 @@
           <a:lstStyle/>
           <a:p>
             <a:pPr algn="ctr"/>
+            <a:endParaRPr lang="en-US"/>
           </a:p>
         </p:txBody>
       </p:sp>
@@ -5960,7 +5971,7 @@
           <a:fillRef idx="3">
             <a:schemeClr val="accent1"/>
           </a:fillRef>
-          <a:effectRef idx="2">
+          <a:effectRef idx="0">
             <a:schemeClr val="accent1"/>
           </a:effectRef>
           <a:fontRef idx="minor">
@@ -5972,6 +5983,7 @@
           <a:lstStyle/>
           <a:p>
             <a:pPr algn="ctr"/>
+            <a:endParaRPr lang="en-US"/>
           </a:p>
         </p:txBody>
       </p:sp>
@@ -6773,7 +6785,7 @@
 </file>
 
 <file path=ppt/slides/slide10.xml><?xml version="1.0" encoding="utf-8"?>
-<p:sld xmlns:a="http://schemas.openxmlformats.org/drawingml/2006/main" xmlns:p="http://schemas.openxmlformats.org/presentationml/2006/main" xmlns:r="http://schemas.openxmlformats.org/officeDocument/2006/relationships">
+<p:sld xmlns:a="http://schemas.openxmlformats.org/drawingml/2006/main" xmlns:p="http://schemas.openxmlformats.org/presentationml/2006/main" xmlns:r="http://schemas.openxmlformats.org/officeDocument/2006/relationships" xmlns:m="http://schemas.openxmlformats.org/officeDocument/2006/math" xmlns:a14="http://schemas.microsoft.com/office/drawing/2010/main" xmlns:mc="http://schemas.openxmlformats.org/markup-compatibility/2006" xmlns:w="http://schemas.openxmlformats.org/wordprocessingml/2006/main" mc:Ignorable="a14">
   <p:cSld>
     <p:spTree>
       <p:nvGrpSpPr>
@@ -6811,7 +6823,7 @@
           <a:fillRef idx="3">
             <a:schemeClr val="accent1"/>
           </a:fillRef>
-          <a:effectRef idx="2">
+          <a:effectRef idx="0">
             <a:schemeClr val="accent1"/>
           </a:effectRef>
           <a:fontRef idx="minor">
@@ -6823,6 +6835,7 @@
           <a:lstStyle/>
           <a:p>
             <a:pPr algn="ctr"/>
+            <a:endParaRPr lang="en-US"/>
           </a:p>
         </p:txBody>
       </p:sp>
@@ -6855,7 +6868,7 @@
           <a:fillRef idx="3">
             <a:schemeClr val="accent1"/>
           </a:fillRef>
-          <a:effectRef idx="2">
+          <a:effectRef idx="0">
             <a:schemeClr val="accent1"/>
           </a:effectRef>
           <a:fontRef idx="minor">
@@ -6867,6 +6880,7 @@
           <a:lstStyle/>
           <a:p>
             <a:pPr algn="ctr"/>
+            <a:endParaRPr lang="en-US"/>
           </a:p>
         </p:txBody>
       </p:sp>
@@ -6979,7 +6993,7 @@
           <a:fillRef idx="3">
             <a:schemeClr val="accent1"/>
           </a:fillRef>
-          <a:effectRef idx="2">
+          <a:effectRef idx="0">
             <a:schemeClr val="accent1"/>
           </a:effectRef>
           <a:fontRef idx="minor">
@@ -6991,6 +7005,7 @@
           <a:lstStyle/>
           <a:p>
             <a:pPr algn="ctr"/>
+            <a:endParaRPr lang="en-US"/>
           </a:p>
         </p:txBody>
       </p:sp>
@@ -7027,7 +7042,7 @@
           <a:fillRef idx="3">
             <a:schemeClr val="accent1"/>
           </a:fillRef>
-          <a:effectRef idx="2">
+          <a:effectRef idx="0">
             <a:schemeClr val="accent1"/>
           </a:effectRef>
           <a:fontRef idx="minor">
@@ -7039,6 +7054,7 @@
           <a:lstStyle/>
           <a:p>
             <a:pPr algn="ctr"/>
+            <a:endParaRPr lang="en-US"/>
           </a:p>
         </p:txBody>
       </p:sp>
@@ -7153,7 +7169,7 @@
           <a:fillRef idx="3">
             <a:schemeClr val="accent1"/>
           </a:fillRef>
-          <a:effectRef idx="2">
+          <a:effectRef idx="0">
             <a:schemeClr val="accent1"/>
           </a:effectRef>
           <a:fontRef idx="minor">
@@ -7165,6 +7181,7 @@
           <a:lstStyle/>
           <a:p>
             <a:pPr algn="ctr"/>
+            <a:endParaRPr lang="en-US"/>
           </a:p>
         </p:txBody>
       </p:sp>
@@ -7279,7 +7296,7 @@
           <a:fillRef idx="3">
             <a:schemeClr val="accent1"/>
           </a:fillRef>
-          <a:effectRef idx="2">
+          <a:effectRef idx="0">
             <a:schemeClr val="accent1"/>
           </a:effectRef>
           <a:fontRef idx="minor">
@@ -7291,6 +7308,7 @@
           <a:lstStyle/>
           <a:p>
             <a:pPr algn="ctr"/>
+            <a:endParaRPr lang="en-US"/>
           </a:p>
         </p:txBody>
       </p:sp>
@@ -7405,7 +7423,7 @@
           <a:fillRef idx="3">
             <a:schemeClr val="accent1"/>
           </a:fillRef>
-          <a:effectRef idx="2">
+          <a:effectRef idx="0">
             <a:schemeClr val="accent1"/>
           </a:effectRef>
           <a:fontRef idx="minor">
@@ -7417,6 +7435,7 @@
           <a:lstStyle/>
           <a:p>
             <a:pPr algn="ctr"/>
+            <a:endParaRPr lang="en-US"/>
           </a:p>
         </p:txBody>
       </p:sp>
@@ -7531,7 +7550,7 @@
           <a:fillRef idx="3">
             <a:schemeClr val="accent1"/>
           </a:fillRef>
-          <a:effectRef idx="2">
+          <a:effectRef idx="0">
             <a:schemeClr val="accent1"/>
           </a:effectRef>
           <a:fontRef idx="minor">
@@ -7543,6 +7562,7 @@
           <a:lstStyle/>
           <a:p>
             <a:pPr algn="ctr"/>
+            <a:endParaRPr lang="en-US"/>
           </a:p>
         </p:txBody>
       </p:sp>
@@ -7657,7 +7677,7 @@
           <a:fillRef idx="3">
             <a:schemeClr val="accent1"/>
           </a:fillRef>
-          <a:effectRef idx="2">
+          <a:effectRef idx="0">
             <a:schemeClr val="accent1"/>
           </a:effectRef>
           <a:fontRef idx="minor">
@@ -7669,6 +7689,7 @@
           <a:lstStyle/>
           <a:p>
             <a:pPr algn="ctr"/>
+            <a:endParaRPr lang="en-US"/>
           </a:p>
         </p:txBody>
       </p:sp>
@@ -7783,7 +7804,7 @@
           <a:fillRef idx="3">
             <a:schemeClr val="accent1"/>
           </a:fillRef>
-          <a:effectRef idx="2">
+          <a:effectRef idx="0">
             <a:schemeClr val="accent1"/>
           </a:effectRef>
           <a:fontRef idx="minor">
@@ -7795,6 +7816,7 @@
           <a:lstStyle/>
           <a:p>
             <a:pPr algn="ctr"/>
+            <a:endParaRPr lang="en-US"/>
           </a:p>
         </p:txBody>
       </p:sp>
@@ -8658,7 +8680,7 @@
 </file>
 
 <file path=ppt/slides/slide11.xml><?xml version="1.0" encoding="utf-8"?>
-<p:sld xmlns:a="http://schemas.openxmlformats.org/drawingml/2006/main" xmlns:p="http://schemas.openxmlformats.org/presentationml/2006/main" xmlns:r="http://schemas.openxmlformats.org/officeDocument/2006/relationships">
+<p:sld xmlns:a="http://schemas.openxmlformats.org/drawingml/2006/main" xmlns:p="http://schemas.openxmlformats.org/presentationml/2006/main" xmlns:r="http://schemas.openxmlformats.org/officeDocument/2006/relationships" xmlns:m="http://schemas.openxmlformats.org/officeDocument/2006/math" xmlns:a14="http://schemas.microsoft.com/office/drawing/2010/main" xmlns:mc="http://schemas.openxmlformats.org/markup-compatibility/2006" xmlns:w="http://schemas.openxmlformats.org/wordprocessingml/2006/main" mc:Ignorable="a14">
   <p:cSld>
     <p:spTree>
       <p:nvGrpSpPr>
@@ -8696,7 +8718,7 @@
           <a:fillRef idx="3">
             <a:schemeClr val="accent1"/>
           </a:fillRef>
-          <a:effectRef idx="2">
+          <a:effectRef idx="0">
             <a:schemeClr val="accent1"/>
           </a:effectRef>
           <a:fontRef idx="minor">
@@ -8708,6 +8730,7 @@
           <a:lstStyle/>
           <a:p>
             <a:pPr algn="ctr"/>
+            <a:endParaRPr lang="en-US"/>
           </a:p>
         </p:txBody>
       </p:sp>
@@ -8740,7 +8763,7 @@
           <a:fillRef idx="3">
             <a:schemeClr val="accent1"/>
           </a:fillRef>
-          <a:effectRef idx="2">
+          <a:effectRef idx="0">
             <a:schemeClr val="accent1"/>
           </a:effectRef>
           <a:fontRef idx="minor">
@@ -8752,6 +8775,7 @@
           <a:lstStyle/>
           <a:p>
             <a:pPr algn="ctr"/>
+            <a:endParaRPr lang="en-US"/>
           </a:p>
         </p:txBody>
       </p:sp>
@@ -8864,7 +8888,7 @@
           <a:fillRef idx="3">
             <a:schemeClr val="accent1"/>
           </a:fillRef>
-          <a:effectRef idx="2">
+          <a:effectRef idx="0">
             <a:schemeClr val="accent1"/>
           </a:effectRef>
           <a:fontRef idx="minor">
@@ -8876,6 +8900,7 @@
           <a:lstStyle/>
           <a:p>
             <a:pPr algn="ctr"/>
+            <a:endParaRPr lang="en-US"/>
           </a:p>
         </p:txBody>
       </p:sp>
@@ -8912,7 +8937,7 @@
           <a:fillRef idx="3">
             <a:schemeClr val="accent1"/>
           </a:fillRef>
-          <a:effectRef idx="2">
+          <a:effectRef idx="0">
             <a:schemeClr val="accent1"/>
           </a:effectRef>
           <a:fontRef idx="minor">
@@ -8924,6 +8949,7 @@
           <a:lstStyle/>
           <a:p>
             <a:pPr algn="ctr"/>
+            <a:endParaRPr lang="en-US"/>
           </a:p>
         </p:txBody>
       </p:sp>
@@ -9038,7 +9064,7 @@
           <a:fillRef idx="3">
             <a:schemeClr val="accent1"/>
           </a:fillRef>
-          <a:effectRef idx="2">
+          <a:effectRef idx="0">
             <a:schemeClr val="accent1"/>
           </a:effectRef>
           <a:fontRef idx="minor">
@@ -9050,6 +9076,7 @@
           <a:lstStyle/>
           <a:p>
             <a:pPr algn="ctr"/>
+            <a:endParaRPr lang="en-US"/>
           </a:p>
         </p:txBody>
       </p:sp>
@@ -9164,7 +9191,7 @@
           <a:fillRef idx="3">
             <a:schemeClr val="accent1"/>
           </a:fillRef>
-          <a:effectRef idx="2">
+          <a:effectRef idx="0">
             <a:schemeClr val="accent1"/>
           </a:effectRef>
           <a:fontRef idx="minor">
@@ -9176,6 +9203,7 @@
           <a:lstStyle/>
           <a:p>
             <a:pPr algn="ctr"/>
+            <a:endParaRPr lang="en-US"/>
           </a:p>
         </p:txBody>
       </p:sp>
@@ -9290,7 +9318,7 @@
           <a:fillRef idx="3">
             <a:schemeClr val="accent1"/>
           </a:fillRef>
-          <a:effectRef idx="2">
+          <a:effectRef idx="0">
             <a:schemeClr val="accent1"/>
           </a:effectRef>
           <a:fontRef idx="minor">
@@ -9302,6 +9330,7 @@
           <a:lstStyle/>
           <a:p>
             <a:pPr algn="ctr"/>
+            <a:endParaRPr lang="en-US"/>
           </a:p>
         </p:txBody>
       </p:sp>
@@ -9416,7 +9445,7 @@
           <a:fillRef idx="3">
             <a:schemeClr val="accent1"/>
           </a:fillRef>
-          <a:effectRef idx="2">
+          <a:effectRef idx="0">
             <a:schemeClr val="accent1"/>
           </a:effectRef>
           <a:fontRef idx="minor">
@@ -9428,6 +9457,7 @@
           <a:lstStyle/>
           <a:p>
             <a:pPr algn="ctr"/>
+            <a:endParaRPr lang="en-US"/>
           </a:p>
         </p:txBody>
       </p:sp>
@@ -9542,7 +9572,7 @@
           <a:fillRef idx="3">
             <a:schemeClr val="accent1"/>
           </a:fillRef>
-          <a:effectRef idx="2">
+          <a:effectRef idx="0">
             <a:schemeClr val="accent1"/>
           </a:effectRef>
           <a:fontRef idx="minor">
@@ -9554,6 +9584,7 @@
           <a:lstStyle/>
           <a:p>
             <a:pPr algn="ctr"/>
+            <a:endParaRPr lang="en-US"/>
           </a:p>
         </p:txBody>
       </p:sp>
@@ -9668,7 +9699,7 @@
           <a:fillRef idx="3">
             <a:schemeClr val="accent1"/>
           </a:fillRef>
-          <a:effectRef idx="2">
+          <a:effectRef idx="0">
             <a:schemeClr val="accent1"/>
           </a:effectRef>
           <a:fontRef idx="minor">
@@ -9680,6 +9711,7 @@
           <a:lstStyle/>
           <a:p>
             <a:pPr algn="ctr"/>
+            <a:endParaRPr lang="en-US"/>
           </a:p>
         </p:txBody>
       </p:sp>
@@ -10543,7 +10575,7 @@
 </file>
 
 <file path=ppt/slides/slide12.xml><?xml version="1.0" encoding="utf-8"?>
-<p:sld xmlns:a="http://schemas.openxmlformats.org/drawingml/2006/main" xmlns:p="http://schemas.openxmlformats.org/presentationml/2006/main" xmlns:r="http://schemas.openxmlformats.org/officeDocument/2006/relationships">
+<p:sld xmlns:a="http://schemas.openxmlformats.org/drawingml/2006/main" xmlns:p="http://schemas.openxmlformats.org/presentationml/2006/main" xmlns:r="http://schemas.openxmlformats.org/officeDocument/2006/relationships" xmlns:m="http://schemas.openxmlformats.org/officeDocument/2006/math" xmlns:a14="http://schemas.microsoft.com/office/drawing/2010/main" xmlns:mc="http://schemas.openxmlformats.org/markup-compatibility/2006" xmlns:w="http://schemas.openxmlformats.org/wordprocessingml/2006/main" mc:Ignorable="a14">
   <p:cSld>
     <p:spTree>
       <p:nvGrpSpPr>
@@ -10581,7 +10613,7 @@
           <a:fillRef idx="3">
             <a:schemeClr val="accent1"/>
           </a:fillRef>
-          <a:effectRef idx="2">
+          <a:effectRef idx="0">
             <a:schemeClr val="accent1"/>
           </a:effectRef>
           <a:fontRef idx="minor">
@@ -10593,6 +10625,7 @@
           <a:lstStyle/>
           <a:p>
             <a:pPr algn="ctr"/>
+            <a:endParaRPr lang="en-US"/>
           </a:p>
         </p:txBody>
       </p:sp>
@@ -10625,7 +10658,7 @@
           <a:fillRef idx="3">
             <a:schemeClr val="accent1"/>
           </a:fillRef>
-          <a:effectRef idx="2">
+          <a:effectRef idx="0">
             <a:schemeClr val="accent1"/>
           </a:effectRef>
           <a:fontRef idx="minor">
@@ -10637,6 +10670,7 @@
           <a:lstStyle/>
           <a:p>
             <a:pPr algn="ctr"/>
+            <a:endParaRPr lang="en-US"/>
           </a:p>
         </p:txBody>
       </p:sp>
@@ -10749,7 +10783,7 @@
           <a:fillRef idx="3">
             <a:schemeClr val="accent1"/>
           </a:fillRef>
-          <a:effectRef idx="2">
+          <a:effectRef idx="0">
             <a:schemeClr val="accent1"/>
           </a:effectRef>
           <a:fontRef idx="minor">
@@ -10761,6 +10795,7 @@
           <a:lstStyle/>
           <a:p>
             <a:pPr algn="ctr"/>
+            <a:endParaRPr lang="en-US"/>
           </a:p>
         </p:txBody>
       </p:sp>
@@ -10797,7 +10832,7 @@
           <a:fillRef idx="3">
             <a:schemeClr val="accent1"/>
           </a:fillRef>
-          <a:effectRef idx="2">
+          <a:effectRef idx="0">
             <a:schemeClr val="accent1"/>
           </a:effectRef>
           <a:fontRef idx="minor">
@@ -10809,6 +10844,7 @@
           <a:lstStyle/>
           <a:p>
             <a:pPr algn="ctr"/>
+            <a:endParaRPr lang="en-US"/>
           </a:p>
         </p:txBody>
       </p:sp>
@@ -10942,7 +10978,7 @@
           <a:fillRef idx="3">
             <a:schemeClr val="accent1"/>
           </a:fillRef>
-          <a:effectRef idx="2">
+          <a:effectRef idx="0">
             <a:schemeClr val="accent1"/>
           </a:effectRef>
           <a:fontRef idx="minor">
@@ -10954,6 +10990,7 @@
           <a:lstStyle/>
           <a:p>
             <a:pPr algn="ctr"/>
+            <a:endParaRPr lang="en-US"/>
           </a:p>
         </p:txBody>
       </p:sp>
@@ -11106,7 +11143,7 @@
           <a:fillRef idx="3">
             <a:schemeClr val="accent1"/>
           </a:fillRef>
-          <a:effectRef idx="2">
+          <a:effectRef idx="0">
             <a:schemeClr val="accent1"/>
           </a:effectRef>
           <a:fontRef idx="minor">
@@ -11118,6 +11155,7 @@
           <a:lstStyle/>
           <a:p>
             <a:pPr algn="ctr"/>
+            <a:endParaRPr lang="en-US"/>
           </a:p>
         </p:txBody>
       </p:sp>
@@ -11731,7 +11769,7 @@
 </file>
 
 <file path=ppt/slides/slide13.xml><?xml version="1.0" encoding="utf-8"?>
-<p:sld xmlns:a="http://schemas.openxmlformats.org/drawingml/2006/main" xmlns:p="http://schemas.openxmlformats.org/presentationml/2006/main" xmlns:r="http://schemas.openxmlformats.org/officeDocument/2006/relationships">
+<p:sld xmlns:a="http://schemas.openxmlformats.org/drawingml/2006/main" xmlns:p="http://schemas.openxmlformats.org/presentationml/2006/main" xmlns:r="http://schemas.openxmlformats.org/officeDocument/2006/relationships" xmlns:m="http://schemas.openxmlformats.org/officeDocument/2006/math" xmlns:a14="http://schemas.microsoft.com/office/drawing/2010/main" xmlns:mc="http://schemas.openxmlformats.org/markup-compatibility/2006" xmlns:w="http://schemas.openxmlformats.org/wordprocessingml/2006/main" mc:Ignorable="a14">
   <p:cSld>
     <p:spTree>
       <p:nvGrpSpPr>
@@ -11769,7 +11807,7 @@
           <a:fillRef idx="3">
             <a:schemeClr val="accent1"/>
           </a:fillRef>
-          <a:effectRef idx="2">
+          <a:effectRef idx="0">
             <a:schemeClr val="accent1"/>
           </a:effectRef>
           <a:fontRef idx="minor">
@@ -11781,6 +11819,7 @@
           <a:lstStyle/>
           <a:p>
             <a:pPr algn="ctr"/>
+            <a:endParaRPr lang="en-US"/>
           </a:p>
         </p:txBody>
       </p:sp>
@@ -11813,7 +11852,7 @@
           <a:fillRef idx="3">
             <a:schemeClr val="accent1"/>
           </a:fillRef>
-          <a:effectRef idx="2">
+          <a:effectRef idx="0">
             <a:schemeClr val="accent1"/>
           </a:effectRef>
           <a:fontRef idx="minor">
@@ -11825,6 +11864,7 @@
           <a:lstStyle/>
           <a:p>
             <a:pPr algn="ctr"/>
+            <a:endParaRPr lang="en-US"/>
           </a:p>
         </p:txBody>
       </p:sp>
@@ -11937,7 +11977,7 @@
           <a:fillRef idx="3">
             <a:schemeClr val="accent1"/>
           </a:fillRef>
-          <a:effectRef idx="2">
+          <a:effectRef idx="0">
             <a:schemeClr val="accent1"/>
           </a:effectRef>
           <a:fontRef idx="minor">
@@ -11949,6 +11989,7 @@
           <a:lstStyle/>
           <a:p>
             <a:pPr algn="ctr"/>
+            <a:endParaRPr lang="en-US"/>
           </a:p>
         </p:txBody>
       </p:sp>
@@ -11985,7 +12026,7 @@
           <a:fillRef idx="3">
             <a:schemeClr val="accent1"/>
           </a:fillRef>
-          <a:effectRef idx="2">
+          <a:effectRef idx="0">
             <a:schemeClr val="accent1"/>
           </a:effectRef>
           <a:fontRef idx="minor">
@@ -11997,6 +12038,7 @@
           <a:lstStyle/>
           <a:p>
             <a:pPr algn="ctr"/>
+            <a:endParaRPr lang="en-US"/>
           </a:p>
         </p:txBody>
       </p:sp>
@@ -12111,7 +12153,7 @@
           <a:fillRef idx="3">
             <a:schemeClr val="accent1"/>
           </a:fillRef>
-          <a:effectRef idx="2">
+          <a:effectRef idx="0">
             <a:schemeClr val="accent1"/>
           </a:effectRef>
           <a:fontRef idx="minor">
@@ -12123,6 +12165,7 @@
           <a:lstStyle/>
           <a:p>
             <a:pPr algn="ctr"/>
+            <a:endParaRPr lang="en-US"/>
           </a:p>
         </p:txBody>
       </p:sp>
@@ -12237,7 +12280,7 @@
           <a:fillRef idx="3">
             <a:schemeClr val="accent1"/>
           </a:fillRef>
-          <a:effectRef idx="2">
+          <a:effectRef idx="0">
             <a:schemeClr val="accent1"/>
           </a:effectRef>
           <a:fontRef idx="minor">
@@ -12249,6 +12292,7 @@
           <a:lstStyle/>
           <a:p>
             <a:pPr algn="ctr"/>
+            <a:endParaRPr lang="en-US"/>
           </a:p>
         </p:txBody>
       </p:sp>
@@ -12363,7 +12407,7 @@
           <a:fillRef idx="3">
             <a:schemeClr val="accent1"/>
           </a:fillRef>
-          <a:effectRef idx="2">
+          <a:effectRef idx="0">
             <a:schemeClr val="accent1"/>
           </a:effectRef>
           <a:fontRef idx="minor">
@@ -12375,6 +12419,7 @@
           <a:lstStyle/>
           <a:p>
             <a:pPr algn="ctr"/>
+            <a:endParaRPr lang="en-US"/>
           </a:p>
         </p:txBody>
       </p:sp>
@@ -12489,7 +12534,7 @@
           <a:fillRef idx="3">
             <a:schemeClr val="accent1"/>
           </a:fillRef>
-          <a:effectRef idx="2">
+          <a:effectRef idx="0">
             <a:schemeClr val="accent1"/>
           </a:effectRef>
           <a:fontRef idx="minor">
@@ -12501,6 +12546,7 @@
           <a:lstStyle/>
           <a:p>
             <a:pPr algn="ctr"/>
+            <a:endParaRPr lang="en-US"/>
           </a:p>
         </p:txBody>
       </p:sp>
@@ -13295,7 +13341,7 @@
 </file>
 
 <file path=ppt/slides/slide14.xml><?xml version="1.0" encoding="utf-8"?>
-<p:sld xmlns:a="http://schemas.openxmlformats.org/drawingml/2006/main" xmlns:p="http://schemas.openxmlformats.org/presentationml/2006/main" xmlns:r="http://schemas.openxmlformats.org/officeDocument/2006/relationships">
+<p:sld xmlns:a="http://schemas.openxmlformats.org/drawingml/2006/main" xmlns:p="http://schemas.openxmlformats.org/presentationml/2006/main" xmlns:r="http://schemas.openxmlformats.org/officeDocument/2006/relationships" xmlns:m="http://schemas.openxmlformats.org/officeDocument/2006/math" xmlns:a14="http://schemas.microsoft.com/office/drawing/2010/main" xmlns:mc="http://schemas.openxmlformats.org/markup-compatibility/2006" xmlns:w="http://schemas.openxmlformats.org/wordprocessingml/2006/main" mc:Ignorable="a14">
   <p:cSld>
     <p:spTree>
       <p:nvGrpSpPr>
@@ -13333,7 +13379,7 @@
           <a:fillRef idx="3">
             <a:schemeClr val="accent1"/>
           </a:fillRef>
-          <a:effectRef idx="2">
+          <a:effectRef idx="0">
             <a:schemeClr val="accent1"/>
           </a:effectRef>
           <a:fontRef idx="minor">
@@ -13345,6 +13391,7 @@
           <a:lstStyle/>
           <a:p>
             <a:pPr algn="ctr"/>
+            <a:endParaRPr lang="en-US"/>
           </a:p>
         </p:txBody>
       </p:sp>
@@ -13377,7 +13424,7 @@
           <a:fillRef idx="3">
             <a:schemeClr val="accent1"/>
           </a:fillRef>
-          <a:effectRef idx="2">
+          <a:effectRef idx="0">
             <a:schemeClr val="accent1"/>
           </a:effectRef>
           <a:fontRef idx="minor">
@@ -13389,6 +13436,7 @@
           <a:lstStyle/>
           <a:p>
             <a:pPr algn="ctr"/>
+            <a:endParaRPr lang="en-US"/>
           </a:p>
         </p:txBody>
       </p:sp>
@@ -13501,7 +13549,7 @@
           <a:fillRef idx="3">
             <a:schemeClr val="accent1"/>
           </a:fillRef>
-          <a:effectRef idx="2">
+          <a:effectRef idx="0">
             <a:schemeClr val="accent1"/>
           </a:effectRef>
           <a:fontRef idx="minor">
@@ -13513,6 +13561,7 @@
           <a:lstStyle/>
           <a:p>
             <a:pPr algn="ctr"/>
+            <a:endParaRPr lang="en-US"/>
           </a:p>
         </p:txBody>
       </p:sp>
@@ -13549,7 +13598,7 @@
           <a:fillRef idx="3">
             <a:schemeClr val="accent1"/>
           </a:fillRef>
-          <a:effectRef idx="2">
+          <a:effectRef idx="0">
             <a:schemeClr val="accent1"/>
           </a:effectRef>
           <a:fontRef idx="minor">
@@ -13561,6 +13610,7 @@
           <a:lstStyle/>
           <a:p>
             <a:pPr algn="ctr"/>
+            <a:endParaRPr lang="en-US"/>
           </a:p>
         </p:txBody>
       </p:sp>
@@ -13593,7 +13643,7 @@
           <a:fillRef idx="3">
             <a:schemeClr val="accent1"/>
           </a:fillRef>
-          <a:effectRef idx="2">
+          <a:effectRef idx="0">
             <a:schemeClr val="accent1"/>
           </a:effectRef>
           <a:fontRef idx="minor">
@@ -13605,6 +13655,7 @@
           <a:lstStyle/>
           <a:p>
             <a:pPr algn="ctr"/>
+            <a:endParaRPr lang="en-US"/>
           </a:p>
         </p:txBody>
       </p:sp>
@@ -13719,7 +13770,7 @@
           <a:fillRef idx="3">
             <a:schemeClr val="accent1"/>
           </a:fillRef>
-          <a:effectRef idx="2">
+          <a:effectRef idx="0">
             <a:schemeClr val="accent1"/>
           </a:effectRef>
           <a:fontRef idx="minor">
@@ -13731,6 +13782,7 @@
           <a:lstStyle/>
           <a:p>
             <a:pPr algn="ctr"/>
+            <a:endParaRPr lang="en-US"/>
           </a:p>
         </p:txBody>
       </p:sp>
@@ -13763,7 +13815,7 @@
           <a:fillRef idx="3">
             <a:schemeClr val="accent1"/>
           </a:fillRef>
-          <a:effectRef idx="2">
+          <a:effectRef idx="0">
             <a:schemeClr val="accent1"/>
           </a:effectRef>
           <a:fontRef idx="minor">
@@ -13775,6 +13827,7 @@
           <a:lstStyle/>
           <a:p>
             <a:pPr algn="ctr"/>
+            <a:endParaRPr lang="en-US"/>
           </a:p>
         </p:txBody>
       </p:sp>
@@ -13889,7 +13942,7 @@
           <a:fillRef idx="3">
             <a:schemeClr val="accent1"/>
           </a:fillRef>
-          <a:effectRef idx="2">
+          <a:effectRef idx="0">
             <a:schemeClr val="accent1"/>
           </a:effectRef>
           <a:fontRef idx="minor">
@@ -13901,6 +13954,7 @@
           <a:lstStyle/>
           <a:p>
             <a:pPr algn="ctr"/>
+            <a:endParaRPr lang="en-US"/>
           </a:p>
         </p:txBody>
       </p:sp>
@@ -13933,7 +13987,7 @@
           <a:fillRef idx="3">
             <a:schemeClr val="accent1"/>
           </a:fillRef>
-          <a:effectRef idx="2">
+          <a:effectRef idx="0">
             <a:schemeClr val="accent1"/>
           </a:effectRef>
           <a:fontRef idx="minor">
@@ -13945,6 +13999,7 @@
           <a:lstStyle/>
           <a:p>
             <a:pPr algn="ctr"/>
+            <a:endParaRPr lang="en-US"/>
           </a:p>
         </p:txBody>
       </p:sp>
@@ -14059,7 +14114,7 @@
           <a:fillRef idx="3">
             <a:schemeClr val="accent1"/>
           </a:fillRef>
-          <a:effectRef idx="2">
+          <a:effectRef idx="0">
             <a:schemeClr val="accent1"/>
           </a:effectRef>
           <a:fontRef idx="minor">
@@ -14071,6 +14126,7 @@
           <a:lstStyle/>
           <a:p>
             <a:pPr algn="ctr"/>
+            <a:endParaRPr lang="en-US"/>
           </a:p>
         </p:txBody>
       </p:sp>
@@ -14103,7 +14159,7 @@
           <a:fillRef idx="3">
             <a:schemeClr val="accent1"/>
           </a:fillRef>
-          <a:effectRef idx="2">
+          <a:effectRef idx="0">
             <a:schemeClr val="accent1"/>
           </a:effectRef>
           <a:fontRef idx="minor">
@@ -14115,6 +14171,7 @@
           <a:lstStyle/>
           <a:p>
             <a:pPr algn="ctr"/>
+            <a:endParaRPr lang="en-US"/>
           </a:p>
         </p:txBody>
       </p:sp>
@@ -14229,7 +14286,7 @@
           <a:fillRef idx="3">
             <a:schemeClr val="accent1"/>
           </a:fillRef>
-          <a:effectRef idx="2">
+          <a:effectRef idx="0">
             <a:schemeClr val="accent1"/>
           </a:effectRef>
           <a:fontRef idx="minor">
@@ -14241,6 +14298,7 @@
           <a:lstStyle/>
           <a:p>
             <a:pPr algn="ctr"/>
+            <a:endParaRPr lang="en-US"/>
           </a:p>
         </p:txBody>
       </p:sp>
@@ -14273,7 +14331,7 @@
           <a:fillRef idx="3">
             <a:schemeClr val="accent1"/>
           </a:fillRef>
-          <a:effectRef idx="2">
+          <a:effectRef idx="0">
             <a:schemeClr val="accent1"/>
           </a:effectRef>
           <a:fontRef idx="minor">
@@ -14285,6 +14343,7 @@
           <a:lstStyle/>
           <a:p>
             <a:pPr algn="ctr"/>
+            <a:endParaRPr lang="en-US"/>
           </a:p>
         </p:txBody>
       </p:sp>
@@ -14399,7 +14458,7 @@
           <a:fillRef idx="3">
             <a:schemeClr val="accent1"/>
           </a:fillRef>
-          <a:effectRef idx="2">
+          <a:effectRef idx="0">
             <a:schemeClr val="accent1"/>
           </a:effectRef>
           <a:fontRef idx="minor">
@@ -14411,6 +14470,7 @@
           <a:lstStyle/>
           <a:p>
             <a:pPr algn="ctr"/>
+            <a:endParaRPr lang="en-US"/>
           </a:p>
         </p:txBody>
       </p:sp>
@@ -14443,7 +14503,7 @@
           <a:fillRef idx="3">
             <a:schemeClr val="accent1"/>
           </a:fillRef>
-          <a:effectRef idx="2">
+          <a:effectRef idx="0">
             <a:schemeClr val="accent1"/>
           </a:effectRef>
           <a:fontRef idx="minor">
@@ -14455,6 +14515,7 @@
           <a:lstStyle/>
           <a:p>
             <a:pPr algn="ctr"/>
+            <a:endParaRPr lang="en-US"/>
           </a:p>
         </p:txBody>
       </p:sp>
@@ -14569,7 +14630,7 @@
           <a:fillRef idx="3">
             <a:schemeClr val="accent1"/>
           </a:fillRef>
-          <a:effectRef idx="2">
+          <a:effectRef idx="0">
             <a:schemeClr val="accent1"/>
           </a:effectRef>
           <a:fontRef idx="minor">
@@ -14581,6 +14642,7 @@
           <a:lstStyle/>
           <a:p>
             <a:pPr algn="ctr"/>
+            <a:endParaRPr lang="en-US"/>
           </a:p>
         </p:txBody>
       </p:sp>
@@ -14613,7 +14675,7 @@
           <a:fillRef idx="3">
             <a:schemeClr val="accent1"/>
           </a:fillRef>
-          <a:effectRef idx="2">
+          <a:effectRef idx="0">
             <a:schemeClr val="accent1"/>
           </a:effectRef>
           <a:fontRef idx="minor">
@@ -14625,6 +14687,7 @@
           <a:lstStyle/>
           <a:p>
             <a:pPr algn="ctr"/>
+            <a:endParaRPr lang="en-US"/>
           </a:p>
         </p:txBody>
       </p:sp>
@@ -15740,7 +15803,7 @@
 </file>
 
 <file path=ppt/slides/slide15.xml><?xml version="1.0" encoding="utf-8"?>
-<p:sld xmlns:a="http://schemas.openxmlformats.org/drawingml/2006/main" xmlns:p="http://schemas.openxmlformats.org/presentationml/2006/main" xmlns:r="http://schemas.openxmlformats.org/officeDocument/2006/relationships">
+<p:sld xmlns:a="http://schemas.openxmlformats.org/drawingml/2006/main" xmlns:p="http://schemas.openxmlformats.org/presentationml/2006/main" xmlns:r="http://schemas.openxmlformats.org/officeDocument/2006/relationships" xmlns:m="http://schemas.openxmlformats.org/officeDocument/2006/math" xmlns:a14="http://schemas.microsoft.com/office/drawing/2010/main" xmlns:mc="http://schemas.openxmlformats.org/markup-compatibility/2006" xmlns:w="http://schemas.openxmlformats.org/wordprocessingml/2006/main" mc:Ignorable="a14">
   <p:cSld>
     <p:spTree>
       <p:nvGrpSpPr>
@@ -15778,7 +15841,7 @@
           <a:fillRef idx="3">
             <a:schemeClr val="accent1"/>
           </a:fillRef>
-          <a:effectRef idx="2">
+          <a:effectRef idx="0">
             <a:schemeClr val="accent1"/>
           </a:effectRef>
           <a:fontRef idx="minor">
@@ -15790,6 +15853,7 @@
           <a:lstStyle/>
           <a:p>
             <a:pPr algn="ctr"/>
+            <a:endParaRPr lang="en-US"/>
           </a:p>
         </p:txBody>
       </p:sp>
@@ -15822,7 +15886,7 @@
           <a:fillRef idx="3">
             <a:schemeClr val="accent1"/>
           </a:fillRef>
-          <a:effectRef idx="2">
+          <a:effectRef idx="0">
             <a:schemeClr val="accent1"/>
           </a:effectRef>
           <a:fontRef idx="minor">
@@ -15834,6 +15898,7 @@
           <a:lstStyle/>
           <a:p>
             <a:pPr algn="ctr"/>
+            <a:endParaRPr lang="en-US"/>
           </a:p>
         </p:txBody>
       </p:sp>
@@ -15946,7 +16011,7 @@
           <a:fillRef idx="3">
             <a:schemeClr val="accent1"/>
           </a:fillRef>
-          <a:effectRef idx="2">
+          <a:effectRef idx="0">
             <a:schemeClr val="accent1"/>
           </a:effectRef>
           <a:fontRef idx="minor">
@@ -15958,6 +16023,7 @@
           <a:lstStyle/>
           <a:p>
             <a:pPr algn="ctr"/>
+            <a:endParaRPr lang="en-US"/>
           </a:p>
         </p:txBody>
       </p:sp>
@@ -15994,7 +16060,7 @@
           <a:fillRef idx="3">
             <a:schemeClr val="accent1"/>
           </a:fillRef>
-          <a:effectRef idx="2">
+          <a:effectRef idx="0">
             <a:schemeClr val="accent1"/>
           </a:effectRef>
           <a:fontRef idx="minor">
@@ -16006,6 +16072,7 @@
           <a:lstStyle/>
           <a:p>
             <a:pPr algn="ctr"/>
+            <a:endParaRPr lang="en-US"/>
           </a:p>
         </p:txBody>
       </p:sp>
@@ -16120,7 +16187,7 @@
           <a:fillRef idx="3">
             <a:schemeClr val="accent1"/>
           </a:fillRef>
-          <a:effectRef idx="2">
+          <a:effectRef idx="0">
             <a:schemeClr val="accent1"/>
           </a:effectRef>
           <a:fontRef idx="minor">
@@ -16132,6 +16199,7 @@
           <a:lstStyle/>
           <a:p>
             <a:pPr algn="ctr"/>
+            <a:endParaRPr lang="en-US"/>
           </a:p>
         </p:txBody>
       </p:sp>
@@ -16246,7 +16314,7 @@
           <a:fillRef idx="3">
             <a:schemeClr val="accent1"/>
           </a:fillRef>
-          <a:effectRef idx="2">
+          <a:effectRef idx="0">
             <a:schemeClr val="accent1"/>
           </a:effectRef>
           <a:fontRef idx="minor">
@@ -16258,6 +16326,7 @@
           <a:lstStyle/>
           <a:p>
             <a:pPr algn="ctr"/>
+            <a:endParaRPr lang="en-US"/>
           </a:p>
         </p:txBody>
       </p:sp>
@@ -16372,7 +16441,7 @@
           <a:fillRef idx="3">
             <a:schemeClr val="accent1"/>
           </a:fillRef>
-          <a:effectRef idx="2">
+          <a:effectRef idx="0">
             <a:schemeClr val="accent1"/>
           </a:effectRef>
           <a:fontRef idx="minor">
@@ -16384,6 +16453,7 @@
           <a:lstStyle/>
           <a:p>
             <a:pPr algn="ctr"/>
+            <a:endParaRPr lang="en-US"/>
           </a:p>
         </p:txBody>
       </p:sp>
@@ -16498,7 +16568,7 @@
           <a:fillRef idx="3">
             <a:schemeClr val="accent1"/>
           </a:fillRef>
-          <a:effectRef idx="2">
+          <a:effectRef idx="0">
             <a:schemeClr val="accent1"/>
           </a:effectRef>
           <a:fontRef idx="minor">
@@ -16510,6 +16580,7 @@
           <a:lstStyle/>
           <a:p>
             <a:pPr algn="ctr"/>
+            <a:endParaRPr lang="en-US"/>
           </a:p>
         </p:txBody>
       </p:sp>
@@ -16624,7 +16695,7 @@
           <a:fillRef idx="3">
             <a:schemeClr val="accent1"/>
           </a:fillRef>
-          <a:effectRef idx="2">
+          <a:effectRef idx="0">
             <a:schemeClr val="accent1"/>
           </a:effectRef>
           <a:fontRef idx="minor">
@@ -16636,6 +16707,7 @@
           <a:lstStyle/>
           <a:p>
             <a:pPr algn="ctr"/>
+            <a:endParaRPr lang="en-US"/>
           </a:p>
         </p:txBody>
       </p:sp>
@@ -16750,7 +16822,7 @@
           <a:fillRef idx="3">
             <a:schemeClr val="accent1"/>
           </a:fillRef>
-          <a:effectRef idx="2">
+          <a:effectRef idx="0">
             <a:schemeClr val="accent1"/>
           </a:effectRef>
           <a:fontRef idx="minor">
@@ -16762,6 +16834,7 @@
           <a:lstStyle/>
           <a:p>
             <a:pPr algn="ctr"/>
+            <a:endParaRPr lang="en-US"/>
           </a:p>
         </p:txBody>
       </p:sp>
@@ -16876,7 +16949,7 @@
           <a:fillRef idx="3">
             <a:schemeClr val="accent1"/>
           </a:fillRef>
-          <a:effectRef idx="2">
+          <a:effectRef idx="0">
             <a:schemeClr val="accent1"/>
           </a:effectRef>
           <a:fontRef idx="minor">
@@ -16888,6 +16961,7 @@
           <a:lstStyle/>
           <a:p>
             <a:pPr algn="ctr"/>
+            <a:endParaRPr lang="en-US"/>
           </a:p>
         </p:txBody>
       </p:sp>
@@ -17764,7 +17838,7 @@
 </file>
 
 <file path=ppt/slides/slide16.xml><?xml version="1.0" encoding="utf-8"?>
-<p:sld xmlns:a="http://schemas.openxmlformats.org/drawingml/2006/main" xmlns:p="http://schemas.openxmlformats.org/presentationml/2006/main" xmlns:r="http://schemas.openxmlformats.org/officeDocument/2006/relationships">
+<p:sld xmlns:a="http://schemas.openxmlformats.org/drawingml/2006/main" xmlns:p="http://schemas.openxmlformats.org/presentationml/2006/main" xmlns:r="http://schemas.openxmlformats.org/officeDocument/2006/relationships" xmlns:m="http://schemas.openxmlformats.org/officeDocument/2006/math" xmlns:a14="http://schemas.microsoft.com/office/drawing/2010/main" xmlns:mc="http://schemas.openxmlformats.org/markup-compatibility/2006" xmlns:w="http://schemas.openxmlformats.org/wordprocessingml/2006/main" mc:Ignorable="a14">
   <p:cSld>
     <p:spTree>
       <p:nvGrpSpPr>
@@ -17802,7 +17876,7 @@
           <a:fillRef idx="3">
             <a:schemeClr val="accent1"/>
           </a:fillRef>
-          <a:effectRef idx="2">
+          <a:effectRef idx="0">
             <a:schemeClr val="accent1"/>
           </a:effectRef>
           <a:fontRef idx="minor">
@@ -17814,6 +17888,7 @@
           <a:lstStyle/>
           <a:p>
             <a:pPr algn="ctr"/>
+            <a:endParaRPr lang="en-US"/>
           </a:p>
         </p:txBody>
       </p:sp>
@@ -17846,7 +17921,7 @@
           <a:fillRef idx="3">
             <a:schemeClr val="accent1"/>
           </a:fillRef>
-          <a:effectRef idx="2">
+          <a:effectRef idx="0">
             <a:schemeClr val="accent1"/>
           </a:effectRef>
           <a:fontRef idx="minor">
@@ -17858,6 +17933,7 @@
           <a:lstStyle/>
           <a:p>
             <a:pPr algn="ctr"/>
+            <a:endParaRPr lang="en-US"/>
           </a:p>
         </p:txBody>
       </p:sp>
@@ -17970,7 +18046,7 @@
           <a:fillRef idx="3">
             <a:schemeClr val="accent1"/>
           </a:fillRef>
-          <a:effectRef idx="2">
+          <a:effectRef idx="0">
             <a:schemeClr val="accent1"/>
           </a:effectRef>
           <a:fontRef idx="minor">
@@ -17982,6 +18058,7 @@
           <a:lstStyle/>
           <a:p>
             <a:pPr algn="ctr"/>
+            <a:endParaRPr lang="en-US"/>
           </a:p>
         </p:txBody>
       </p:sp>
@@ -18018,7 +18095,7 @@
           <a:fillRef idx="3">
             <a:schemeClr val="accent1"/>
           </a:fillRef>
-          <a:effectRef idx="2">
+          <a:effectRef idx="0">
             <a:schemeClr val="accent1"/>
           </a:effectRef>
           <a:fontRef idx="minor">
@@ -18030,6 +18107,7 @@
           <a:lstStyle/>
           <a:p>
             <a:pPr algn="ctr"/>
+            <a:endParaRPr lang="en-US"/>
           </a:p>
         </p:txBody>
       </p:sp>
@@ -18124,7 +18202,7 @@
           <a:fillRef idx="3">
             <a:schemeClr val="accent1"/>
           </a:fillRef>
-          <a:effectRef idx="2">
+          <a:effectRef idx="0">
             <a:schemeClr val="accent1"/>
           </a:effectRef>
           <a:fontRef idx="minor">
@@ -18136,6 +18214,7 @@
           <a:lstStyle/>
           <a:p>
             <a:pPr algn="ctr"/>
+            <a:endParaRPr lang="en-US"/>
           </a:p>
         </p:txBody>
       </p:sp>
@@ -18658,7 +18737,7 @@
 </file>
 
 <file path=ppt/slides/slide17.xml><?xml version="1.0" encoding="utf-8"?>
-<p:sld xmlns:a="http://schemas.openxmlformats.org/drawingml/2006/main" xmlns:p="http://schemas.openxmlformats.org/presentationml/2006/main" xmlns:r="http://schemas.openxmlformats.org/officeDocument/2006/relationships">
+<p:sld xmlns:a="http://schemas.openxmlformats.org/drawingml/2006/main" xmlns:p="http://schemas.openxmlformats.org/presentationml/2006/main" xmlns:r="http://schemas.openxmlformats.org/officeDocument/2006/relationships" xmlns:m="http://schemas.openxmlformats.org/officeDocument/2006/math" xmlns:a14="http://schemas.microsoft.com/office/drawing/2010/main" xmlns:mc="http://schemas.openxmlformats.org/markup-compatibility/2006" xmlns:w="http://schemas.openxmlformats.org/wordprocessingml/2006/main" mc:Ignorable="a14">
   <p:cSld>
     <p:spTree>
       <p:nvGrpSpPr>
@@ -18696,7 +18775,7 @@
           <a:fillRef idx="3">
             <a:schemeClr val="accent1"/>
           </a:fillRef>
-          <a:effectRef idx="2">
+          <a:effectRef idx="0">
             <a:schemeClr val="accent1"/>
           </a:effectRef>
           <a:fontRef idx="minor">
@@ -18708,6 +18787,7 @@
           <a:lstStyle/>
           <a:p>
             <a:pPr algn="ctr"/>
+            <a:endParaRPr lang="en-US"/>
           </a:p>
         </p:txBody>
       </p:sp>
@@ -18740,7 +18820,7 @@
           <a:fillRef idx="3">
             <a:schemeClr val="accent1"/>
           </a:fillRef>
-          <a:effectRef idx="2">
+          <a:effectRef idx="0">
             <a:schemeClr val="accent1"/>
           </a:effectRef>
           <a:fontRef idx="minor">
@@ -18752,6 +18832,7 @@
           <a:lstStyle/>
           <a:p>
             <a:pPr algn="ctr"/>
+            <a:endParaRPr lang="en-US"/>
           </a:p>
         </p:txBody>
       </p:sp>
@@ -18864,7 +18945,7 @@
           <a:fillRef idx="3">
             <a:schemeClr val="accent1"/>
           </a:fillRef>
-          <a:effectRef idx="2">
+          <a:effectRef idx="0">
             <a:schemeClr val="accent1"/>
           </a:effectRef>
           <a:fontRef idx="minor">
@@ -18876,6 +18957,7 @@
           <a:lstStyle/>
           <a:p>
             <a:pPr algn="ctr"/>
+            <a:endParaRPr lang="en-US"/>
           </a:p>
         </p:txBody>
       </p:sp>
@@ -18912,7 +18994,7 @@
           <a:fillRef idx="3">
             <a:schemeClr val="accent1"/>
           </a:fillRef>
-          <a:effectRef idx="2">
+          <a:effectRef idx="0">
             <a:schemeClr val="accent1"/>
           </a:effectRef>
           <a:fontRef idx="minor">
@@ -18924,6 +19006,7 @@
           <a:lstStyle/>
           <a:p>
             <a:pPr algn="ctr"/>
+            <a:endParaRPr lang="en-US"/>
           </a:p>
         </p:txBody>
       </p:sp>
@@ -19018,7 +19101,7 @@
           <a:fillRef idx="3">
             <a:schemeClr val="accent1"/>
           </a:fillRef>
-          <a:effectRef idx="2">
+          <a:effectRef idx="0">
             <a:schemeClr val="accent1"/>
           </a:effectRef>
           <a:fontRef idx="minor">
@@ -19030,6 +19113,7 @@
           <a:lstStyle/>
           <a:p>
             <a:pPr algn="ctr"/>
+            <a:endParaRPr lang="en-US"/>
           </a:p>
         </p:txBody>
       </p:sp>
@@ -19124,7 +19208,7 @@
           <a:fillRef idx="3">
             <a:schemeClr val="accent1"/>
           </a:fillRef>
-          <a:effectRef idx="2">
+          <a:effectRef idx="0">
             <a:schemeClr val="accent1"/>
           </a:effectRef>
           <a:fontRef idx="minor">
@@ -19136,6 +19220,7 @@
           <a:lstStyle/>
           <a:p>
             <a:pPr algn="ctr"/>
+            <a:endParaRPr lang="en-US"/>
           </a:p>
         </p:txBody>
       </p:sp>
@@ -19230,7 +19315,7 @@
           <a:fillRef idx="3">
             <a:schemeClr val="accent1"/>
           </a:fillRef>
-          <a:effectRef idx="2">
+          <a:effectRef idx="0">
             <a:schemeClr val="accent1"/>
           </a:effectRef>
           <a:fontRef idx="minor">
@@ -19242,6 +19327,7 @@
           <a:lstStyle/>
           <a:p>
             <a:pPr algn="ctr"/>
+            <a:endParaRPr lang="en-US"/>
           </a:p>
         </p:txBody>
       </p:sp>
@@ -19336,7 +19422,7 @@
           <a:fillRef idx="3">
             <a:schemeClr val="accent1"/>
           </a:fillRef>
-          <a:effectRef idx="2">
+          <a:effectRef idx="0">
             <a:schemeClr val="accent1"/>
           </a:effectRef>
           <a:fontRef idx="minor">
@@ -19348,6 +19434,7 @@
           <a:lstStyle/>
           <a:p>
             <a:pPr algn="ctr"/>
+            <a:endParaRPr lang="en-US"/>
           </a:p>
         </p:txBody>
       </p:sp>
@@ -19442,7 +19529,7 @@
           <a:fillRef idx="3">
             <a:schemeClr val="accent1"/>
           </a:fillRef>
-          <a:effectRef idx="2">
+          <a:effectRef idx="0">
             <a:schemeClr val="accent1"/>
           </a:effectRef>
           <a:fontRef idx="minor">
@@ -19454,6 +19541,7 @@
           <a:lstStyle/>
           <a:p>
             <a:pPr algn="ctr"/>
+            <a:endParaRPr lang="en-US"/>
           </a:p>
         </p:txBody>
       </p:sp>
@@ -19548,7 +19636,7 @@
           <a:fillRef idx="3">
             <a:schemeClr val="accent1"/>
           </a:fillRef>
-          <a:effectRef idx="2">
+          <a:effectRef idx="0">
             <a:schemeClr val="accent1"/>
           </a:effectRef>
           <a:fontRef idx="minor">
@@ -19560,6 +19648,7 @@
           <a:lstStyle/>
           <a:p>
             <a:pPr algn="ctr"/>
+            <a:endParaRPr lang="en-US"/>
           </a:p>
         </p:txBody>
       </p:sp>
@@ -19654,7 +19743,7 @@
           <a:fillRef idx="3">
             <a:schemeClr val="accent1"/>
           </a:fillRef>
-          <a:effectRef idx="2">
+          <a:effectRef idx="0">
             <a:schemeClr val="accent1"/>
           </a:effectRef>
           <a:fontRef idx="minor">
@@ -19666,6 +19755,7 @@
           <a:lstStyle/>
           <a:p>
             <a:pPr algn="ctr"/>
+            <a:endParaRPr lang="en-US"/>
           </a:p>
         </p:txBody>
       </p:sp>
@@ -19760,7 +19850,7 @@
           <a:fillRef idx="3">
             <a:schemeClr val="accent1"/>
           </a:fillRef>
-          <a:effectRef idx="2">
+          <a:effectRef idx="0">
             <a:schemeClr val="accent1"/>
           </a:effectRef>
           <a:fontRef idx="minor">
@@ -19772,6 +19862,7 @@
           <a:lstStyle/>
           <a:p>
             <a:pPr algn="ctr"/>
+            <a:endParaRPr lang="en-US"/>
           </a:p>
         </p:txBody>
       </p:sp>
@@ -19866,7 +19957,7 @@
           <a:fillRef idx="3">
             <a:schemeClr val="accent1"/>
           </a:fillRef>
-          <a:effectRef idx="2">
+          <a:effectRef idx="0">
             <a:schemeClr val="accent1"/>
           </a:effectRef>
           <a:fontRef idx="minor">
@@ -19878,6 +19969,7 @@
           <a:lstStyle/>
           <a:p>
             <a:pPr algn="ctr"/>
+            <a:endParaRPr lang="en-US"/>
           </a:p>
         </p:txBody>
       </p:sp>
@@ -19972,7 +20064,7 @@
           <a:fillRef idx="3">
             <a:schemeClr val="accent1"/>
           </a:fillRef>
-          <a:effectRef idx="2">
+          <a:effectRef idx="0">
             <a:schemeClr val="accent1"/>
           </a:effectRef>
           <a:fontRef idx="minor">
@@ -19984,6 +20076,7 @@
           <a:lstStyle/>
           <a:p>
             <a:pPr algn="ctr"/>
+            <a:endParaRPr lang="en-US"/>
           </a:p>
         </p:txBody>
       </p:sp>
@@ -20078,7 +20171,7 @@
           <a:fillRef idx="3">
             <a:schemeClr val="accent1"/>
           </a:fillRef>
-          <a:effectRef idx="2">
+          <a:effectRef idx="0">
             <a:schemeClr val="accent1"/>
           </a:effectRef>
           <a:fontRef idx="minor">
@@ -20090,6 +20183,7 @@
           <a:lstStyle/>
           <a:p>
             <a:pPr algn="ctr"/>
+            <a:endParaRPr lang="en-US"/>
           </a:p>
         </p:txBody>
       </p:sp>
@@ -20897,7 +20991,7 @@
 </file>
 
 <file path=ppt/slides/slide18.xml><?xml version="1.0" encoding="utf-8"?>
-<p:sld xmlns:a="http://schemas.openxmlformats.org/drawingml/2006/main" xmlns:p="http://schemas.openxmlformats.org/presentationml/2006/main" xmlns:r="http://schemas.openxmlformats.org/officeDocument/2006/relationships">
+<p:sld xmlns:a="http://schemas.openxmlformats.org/drawingml/2006/main" xmlns:p="http://schemas.openxmlformats.org/presentationml/2006/main" xmlns:r="http://schemas.openxmlformats.org/officeDocument/2006/relationships" xmlns:m="http://schemas.openxmlformats.org/officeDocument/2006/math" xmlns:a14="http://schemas.microsoft.com/office/drawing/2010/main" xmlns:mc="http://schemas.openxmlformats.org/markup-compatibility/2006" xmlns:w="http://schemas.openxmlformats.org/wordprocessingml/2006/main" mc:Ignorable="a14">
   <p:cSld>
     <p:spTree>
       <p:nvGrpSpPr>
@@ -20935,7 +21029,7 @@
           <a:fillRef idx="3">
             <a:schemeClr val="accent1"/>
           </a:fillRef>
-          <a:effectRef idx="2">
+          <a:effectRef idx="0">
             <a:schemeClr val="accent1"/>
           </a:effectRef>
           <a:fontRef idx="minor">
@@ -20947,6 +21041,7 @@
           <a:lstStyle/>
           <a:p>
             <a:pPr algn="ctr"/>
+            <a:endParaRPr lang="en-US"/>
           </a:p>
         </p:txBody>
       </p:sp>
@@ -20979,7 +21074,7 @@
           <a:fillRef idx="3">
             <a:schemeClr val="accent1"/>
           </a:fillRef>
-          <a:effectRef idx="2">
+          <a:effectRef idx="0">
             <a:schemeClr val="accent1"/>
           </a:effectRef>
           <a:fontRef idx="minor">
@@ -20991,6 +21086,7 @@
           <a:lstStyle/>
           <a:p>
             <a:pPr algn="ctr"/>
+            <a:endParaRPr lang="en-US"/>
           </a:p>
         </p:txBody>
       </p:sp>
@@ -21023,7 +21119,7 @@
           <a:fillRef idx="3">
             <a:schemeClr val="accent1"/>
           </a:fillRef>
-          <a:effectRef idx="2">
+          <a:effectRef idx="0">
             <a:schemeClr val="accent1"/>
           </a:effectRef>
           <a:fontRef idx="minor">
@@ -21035,6 +21131,7 @@
           <a:lstStyle/>
           <a:p>
             <a:pPr algn="ctr"/>
+            <a:endParaRPr lang="en-US"/>
           </a:p>
         </p:txBody>
       </p:sp>
@@ -21149,7 +21246,7 @@
           <a:fillRef idx="3">
             <a:schemeClr val="accent1"/>
           </a:fillRef>
-          <a:effectRef idx="2">
+          <a:effectRef idx="0">
             <a:schemeClr val="accent1"/>
           </a:effectRef>
           <a:fontRef idx="minor">
@@ -21161,6 +21258,7 @@
           <a:lstStyle/>
           <a:p>
             <a:pPr algn="ctr"/>
+            <a:endParaRPr lang="en-US"/>
           </a:p>
         </p:txBody>
       </p:sp>
@@ -21275,7 +21373,7 @@
           <a:fillRef idx="3">
             <a:schemeClr val="accent1"/>
           </a:fillRef>
-          <a:effectRef idx="2">
+          <a:effectRef idx="0">
             <a:schemeClr val="accent1"/>
           </a:effectRef>
           <a:fontRef idx="minor">
@@ -21287,6 +21385,7 @@
           <a:lstStyle/>
           <a:p>
             <a:pPr algn="ctr"/>
+            <a:endParaRPr lang="en-US"/>
           </a:p>
         </p:txBody>
       </p:sp>
@@ -21401,7 +21500,7 @@
           <a:fillRef idx="3">
             <a:schemeClr val="accent1"/>
           </a:fillRef>
-          <a:effectRef idx="2">
+          <a:effectRef idx="0">
             <a:schemeClr val="accent1"/>
           </a:effectRef>
           <a:fontRef idx="minor">
@@ -21413,6 +21512,7 @@
           <a:lstStyle/>
           <a:p>
             <a:pPr algn="ctr"/>
+            <a:endParaRPr lang="en-US"/>
           </a:p>
         </p:txBody>
       </p:sp>
@@ -22024,7 +22124,7 @@
 </file>
 
 <file path=ppt/slides/slide2.xml><?xml version="1.0" encoding="utf-8"?>
-<p:sld xmlns:a="http://schemas.openxmlformats.org/drawingml/2006/main" xmlns:p="http://schemas.openxmlformats.org/presentationml/2006/main" xmlns:r="http://schemas.openxmlformats.org/officeDocument/2006/relationships">
+<p:sld xmlns:a="http://schemas.openxmlformats.org/drawingml/2006/main" xmlns:p="http://schemas.openxmlformats.org/presentationml/2006/main" xmlns:r="http://schemas.openxmlformats.org/officeDocument/2006/relationships" xmlns:m="http://schemas.openxmlformats.org/officeDocument/2006/math" xmlns:a14="http://schemas.microsoft.com/office/drawing/2010/main" xmlns:mc="http://schemas.openxmlformats.org/markup-compatibility/2006" xmlns:w="http://schemas.openxmlformats.org/wordprocessingml/2006/main" mc:Ignorable="a14">
   <p:cSld>
     <p:spTree>
       <p:nvGrpSpPr>
@@ -22062,7 +22162,7 @@
           <a:fillRef idx="3">
             <a:schemeClr val="accent1"/>
           </a:fillRef>
-          <a:effectRef idx="2">
+          <a:effectRef idx="0">
             <a:schemeClr val="accent1"/>
           </a:effectRef>
           <a:fontRef idx="minor">
@@ -22074,6 +22174,7 @@
           <a:lstStyle/>
           <a:p>
             <a:pPr algn="ctr"/>
+            <a:endParaRPr lang="en-US"/>
           </a:p>
         </p:txBody>
       </p:sp>
@@ -22106,7 +22207,7 @@
           <a:fillRef idx="3">
             <a:schemeClr val="accent1"/>
           </a:fillRef>
-          <a:effectRef idx="2">
+          <a:effectRef idx="0">
             <a:schemeClr val="accent1"/>
           </a:effectRef>
           <a:fontRef idx="minor">
@@ -22118,6 +22219,7 @@
           <a:lstStyle/>
           <a:p>
             <a:pPr algn="ctr"/>
+            <a:endParaRPr lang="en-US"/>
           </a:p>
         </p:txBody>
       </p:sp>
@@ -22230,7 +22332,7 @@
           <a:fillRef idx="3">
             <a:schemeClr val="accent1"/>
           </a:fillRef>
-          <a:effectRef idx="2">
+          <a:effectRef idx="0">
             <a:schemeClr val="accent1"/>
           </a:effectRef>
           <a:fontRef idx="minor">
@@ -22242,6 +22344,7 @@
           <a:lstStyle/>
           <a:p>
             <a:pPr algn="ctr"/>
+            <a:endParaRPr lang="en-US"/>
           </a:p>
         </p:txBody>
       </p:sp>
@@ -22278,7 +22381,7 @@
           <a:fillRef idx="3">
             <a:schemeClr val="accent1"/>
           </a:fillRef>
-          <a:effectRef idx="2">
+          <a:effectRef idx="0">
             <a:schemeClr val="accent1"/>
           </a:effectRef>
           <a:fontRef idx="minor">
@@ -22290,6 +22393,7 @@
           <a:lstStyle/>
           <a:p>
             <a:pPr algn="ctr"/>
+            <a:endParaRPr lang="en-US"/>
           </a:p>
         </p:txBody>
       </p:sp>
@@ -22400,7 +22504,7 @@
           <a:fillRef idx="3">
             <a:schemeClr val="accent1"/>
           </a:fillRef>
-          <a:effectRef idx="2">
+          <a:effectRef idx="0">
             <a:schemeClr val="accent1"/>
           </a:effectRef>
           <a:fontRef idx="minor">
@@ -22412,6 +22516,7 @@
           <a:lstStyle/>
           <a:p>
             <a:pPr algn="ctr"/>
+            <a:endParaRPr lang="en-US"/>
           </a:p>
         </p:txBody>
       </p:sp>
@@ -22448,7 +22553,7 @@
           <a:fillRef idx="3">
             <a:schemeClr val="accent1"/>
           </a:fillRef>
-          <a:effectRef idx="2">
+          <a:effectRef idx="0">
             <a:schemeClr val="accent1"/>
           </a:effectRef>
           <a:fontRef idx="minor">
@@ -22460,6 +22565,7 @@
           <a:lstStyle/>
           <a:p>
             <a:pPr algn="ctr"/>
+            <a:endParaRPr lang="en-US"/>
           </a:p>
         </p:txBody>
       </p:sp>
@@ -22570,7 +22676,7 @@
           <a:fillRef idx="3">
             <a:schemeClr val="accent1"/>
           </a:fillRef>
-          <a:effectRef idx="2">
+          <a:effectRef idx="0">
             <a:schemeClr val="accent1"/>
           </a:effectRef>
           <a:fontRef idx="minor">
@@ -22582,6 +22688,7 @@
           <a:lstStyle/>
           <a:p>
             <a:pPr algn="ctr"/>
+            <a:endParaRPr lang="en-US"/>
           </a:p>
         </p:txBody>
       </p:sp>
@@ -22618,7 +22725,7 @@
           <a:fillRef idx="3">
             <a:schemeClr val="accent1"/>
           </a:fillRef>
-          <a:effectRef idx="2">
+          <a:effectRef idx="0">
             <a:schemeClr val="accent1"/>
           </a:effectRef>
           <a:fontRef idx="minor">
@@ -22630,6 +22737,7 @@
           <a:lstStyle/>
           <a:p>
             <a:pPr algn="ctr"/>
+            <a:endParaRPr lang="en-US"/>
           </a:p>
         </p:txBody>
       </p:sp>
@@ -22740,7 +22848,7 @@
           <a:fillRef idx="3">
             <a:schemeClr val="accent1"/>
           </a:fillRef>
-          <a:effectRef idx="2">
+          <a:effectRef idx="0">
             <a:schemeClr val="accent1"/>
           </a:effectRef>
           <a:fontRef idx="minor">
@@ -22752,6 +22860,7 @@
           <a:lstStyle/>
           <a:p>
             <a:pPr algn="ctr"/>
+            <a:endParaRPr lang="en-US"/>
           </a:p>
         </p:txBody>
       </p:sp>
@@ -22788,7 +22897,7 @@
           <a:fillRef idx="3">
             <a:schemeClr val="accent1"/>
           </a:fillRef>
-          <a:effectRef idx="2">
+          <a:effectRef idx="0">
             <a:schemeClr val="accent1"/>
           </a:effectRef>
           <a:fontRef idx="minor">
@@ -22800,6 +22909,7 @@
           <a:lstStyle/>
           <a:p>
             <a:pPr algn="ctr"/>
+            <a:endParaRPr lang="en-US"/>
           </a:p>
         </p:txBody>
       </p:sp>
@@ -22910,7 +23020,7 @@
           <a:fillRef idx="3">
             <a:schemeClr val="accent1"/>
           </a:fillRef>
-          <a:effectRef idx="2">
+          <a:effectRef idx="0">
             <a:schemeClr val="accent1"/>
           </a:effectRef>
           <a:fontRef idx="minor">
@@ -22922,6 +23032,7 @@
           <a:lstStyle/>
           <a:p>
             <a:pPr algn="ctr"/>
+            <a:endParaRPr lang="en-US"/>
           </a:p>
         </p:txBody>
       </p:sp>
@@ -22958,7 +23069,7 @@
           <a:fillRef idx="3">
             <a:schemeClr val="accent1"/>
           </a:fillRef>
-          <a:effectRef idx="2">
+          <a:effectRef idx="0">
             <a:schemeClr val="accent1"/>
           </a:effectRef>
           <a:fontRef idx="minor">
@@ -22970,6 +23081,7 @@
           <a:lstStyle/>
           <a:p>
             <a:pPr algn="ctr"/>
+            <a:endParaRPr lang="en-US"/>
           </a:p>
         </p:txBody>
       </p:sp>
@@ -23080,7 +23192,7 @@
           <a:fillRef idx="3">
             <a:schemeClr val="accent1"/>
           </a:fillRef>
-          <a:effectRef idx="2">
+          <a:effectRef idx="0">
             <a:schemeClr val="accent1"/>
           </a:effectRef>
           <a:fontRef idx="minor">
@@ -23092,6 +23204,7 @@
           <a:lstStyle/>
           <a:p>
             <a:pPr algn="ctr"/>
+            <a:endParaRPr lang="en-US"/>
           </a:p>
         </p:txBody>
       </p:sp>
@@ -23874,7 +23987,7 @@
 </file>
 
 <file path=ppt/slides/slide3.xml><?xml version="1.0" encoding="utf-8"?>
-<p:sld xmlns:a="http://schemas.openxmlformats.org/drawingml/2006/main" xmlns:p="http://schemas.openxmlformats.org/presentationml/2006/main" xmlns:r="http://schemas.openxmlformats.org/officeDocument/2006/relationships">
+<p:sld xmlns:a="http://schemas.openxmlformats.org/drawingml/2006/main" xmlns:p="http://schemas.openxmlformats.org/presentationml/2006/main" xmlns:r="http://schemas.openxmlformats.org/officeDocument/2006/relationships" xmlns:m="http://schemas.openxmlformats.org/officeDocument/2006/math" xmlns:a14="http://schemas.microsoft.com/office/drawing/2010/main" xmlns:mc="http://schemas.openxmlformats.org/markup-compatibility/2006" xmlns:w="http://schemas.openxmlformats.org/wordprocessingml/2006/main" mc:Ignorable="a14">
   <p:cSld>
     <p:spTree>
       <p:nvGrpSpPr>
@@ -23912,7 +24025,7 @@
           <a:fillRef idx="3">
             <a:schemeClr val="accent1"/>
           </a:fillRef>
-          <a:effectRef idx="2">
+          <a:effectRef idx="0">
             <a:schemeClr val="accent1"/>
           </a:effectRef>
           <a:fontRef idx="minor">
@@ -23924,6 +24037,7 @@
           <a:lstStyle/>
           <a:p>
             <a:pPr algn="ctr"/>
+            <a:endParaRPr lang="en-US"/>
           </a:p>
         </p:txBody>
       </p:sp>
@@ -23956,7 +24070,7 @@
           <a:fillRef idx="3">
             <a:schemeClr val="accent1"/>
           </a:fillRef>
-          <a:effectRef idx="2">
+          <a:effectRef idx="0">
             <a:schemeClr val="accent1"/>
           </a:effectRef>
           <a:fontRef idx="minor">
@@ -23968,6 +24082,7 @@
           <a:lstStyle/>
           <a:p>
             <a:pPr algn="ctr"/>
+            <a:endParaRPr lang="en-US"/>
           </a:p>
         </p:txBody>
       </p:sp>
@@ -24080,7 +24195,7 @@
           <a:fillRef idx="3">
             <a:schemeClr val="accent1"/>
           </a:fillRef>
-          <a:effectRef idx="2">
+          <a:effectRef idx="0">
             <a:schemeClr val="accent1"/>
           </a:effectRef>
           <a:fontRef idx="minor">
@@ -24092,6 +24207,7 @@
           <a:lstStyle/>
           <a:p>
             <a:pPr algn="ctr"/>
+            <a:endParaRPr lang="en-US"/>
           </a:p>
         </p:txBody>
       </p:sp>
@@ -24128,7 +24244,7 @@
           <a:fillRef idx="3">
             <a:schemeClr val="accent1"/>
           </a:fillRef>
-          <a:effectRef idx="2">
+          <a:effectRef idx="0">
             <a:schemeClr val="accent1"/>
           </a:effectRef>
           <a:fontRef idx="minor">
@@ -24140,6 +24256,7 @@
           <a:lstStyle/>
           <a:p>
             <a:pPr algn="ctr"/>
+            <a:endParaRPr lang="en-US"/>
           </a:p>
         </p:txBody>
       </p:sp>
@@ -24312,7 +24429,7 @@
           <a:fillRef idx="3">
             <a:schemeClr val="accent1"/>
           </a:fillRef>
-          <a:effectRef idx="2">
+          <a:effectRef idx="0">
             <a:schemeClr val="accent1"/>
           </a:effectRef>
           <a:fontRef idx="minor">
@@ -24324,6 +24441,7 @@
           <a:lstStyle/>
           <a:p>
             <a:pPr algn="ctr"/>
+            <a:endParaRPr lang="en-US"/>
           </a:p>
         </p:txBody>
       </p:sp>
@@ -24515,7 +24633,7 @@
           <a:fillRef idx="3">
             <a:schemeClr val="accent1"/>
           </a:fillRef>
-          <a:effectRef idx="2">
+          <a:effectRef idx="0">
             <a:schemeClr val="accent1"/>
           </a:effectRef>
           <a:fontRef idx="minor">
@@ -24527,6 +24645,7 @@
           <a:lstStyle/>
           <a:p>
             <a:pPr algn="ctr"/>
+            <a:endParaRPr lang="en-US"/>
           </a:p>
         </p:txBody>
       </p:sp>
@@ -25140,7 +25259,7 @@
 </file>
 
 <file path=ppt/slides/slide4.xml><?xml version="1.0" encoding="utf-8"?>
-<p:sld xmlns:a="http://schemas.openxmlformats.org/drawingml/2006/main" xmlns:p="http://schemas.openxmlformats.org/presentationml/2006/main" xmlns:r="http://schemas.openxmlformats.org/officeDocument/2006/relationships">
+<p:sld xmlns:a="http://schemas.openxmlformats.org/drawingml/2006/main" xmlns:p="http://schemas.openxmlformats.org/presentationml/2006/main" xmlns:r="http://schemas.openxmlformats.org/officeDocument/2006/relationships" xmlns:m="http://schemas.openxmlformats.org/officeDocument/2006/math" xmlns:a14="http://schemas.microsoft.com/office/drawing/2010/main" xmlns:mc="http://schemas.openxmlformats.org/markup-compatibility/2006" xmlns:w="http://schemas.openxmlformats.org/wordprocessingml/2006/main" mc:Ignorable="a14">
   <p:cSld>
     <p:spTree>
       <p:nvGrpSpPr>
@@ -25178,7 +25297,7 @@
           <a:fillRef idx="3">
             <a:schemeClr val="accent1"/>
           </a:fillRef>
-          <a:effectRef idx="2">
+          <a:effectRef idx="0">
             <a:schemeClr val="accent1"/>
           </a:effectRef>
           <a:fontRef idx="minor">
@@ -25190,6 +25309,7 @@
           <a:lstStyle/>
           <a:p>
             <a:pPr algn="ctr"/>
+            <a:endParaRPr lang="en-US"/>
           </a:p>
         </p:txBody>
       </p:sp>
@@ -25222,7 +25342,7 @@
           <a:fillRef idx="3">
             <a:schemeClr val="accent1"/>
           </a:fillRef>
-          <a:effectRef idx="2">
+          <a:effectRef idx="0">
             <a:schemeClr val="accent1"/>
           </a:effectRef>
           <a:fontRef idx="minor">
@@ -25234,6 +25354,7 @@
           <a:lstStyle/>
           <a:p>
             <a:pPr algn="ctr"/>
+            <a:endParaRPr lang="en-US"/>
           </a:p>
         </p:txBody>
       </p:sp>
@@ -25346,7 +25467,7 @@
           <a:fillRef idx="3">
             <a:schemeClr val="accent1"/>
           </a:fillRef>
-          <a:effectRef idx="2">
+          <a:effectRef idx="0">
             <a:schemeClr val="accent1"/>
           </a:effectRef>
           <a:fontRef idx="minor">
@@ -25358,6 +25479,7 @@
           <a:lstStyle/>
           <a:p>
             <a:pPr algn="ctr"/>
+            <a:endParaRPr lang="en-US"/>
           </a:p>
         </p:txBody>
       </p:sp>
@@ -25394,7 +25516,7 @@
           <a:fillRef idx="3">
             <a:schemeClr val="accent1"/>
           </a:fillRef>
-          <a:effectRef idx="2">
+          <a:effectRef idx="0">
             <a:schemeClr val="accent1"/>
           </a:effectRef>
           <a:fontRef idx="minor">
@@ -25406,6 +25528,7 @@
           <a:lstStyle/>
           <a:p>
             <a:pPr algn="ctr"/>
+            <a:endParaRPr lang="en-US"/>
           </a:p>
         </p:txBody>
       </p:sp>
@@ -25539,7 +25662,7 @@
           <a:fillRef idx="3">
             <a:schemeClr val="accent1"/>
           </a:fillRef>
-          <a:effectRef idx="2">
+          <a:effectRef idx="0">
             <a:schemeClr val="accent1"/>
           </a:effectRef>
           <a:fontRef idx="minor">
@@ -25551,6 +25674,7 @@
           <a:lstStyle/>
           <a:p>
             <a:pPr algn="ctr"/>
+            <a:endParaRPr lang="en-US"/>
           </a:p>
         </p:txBody>
       </p:sp>
@@ -25684,7 +25808,7 @@
           <a:fillRef idx="3">
             <a:schemeClr val="accent1"/>
           </a:fillRef>
-          <a:effectRef idx="2">
+          <a:effectRef idx="0">
             <a:schemeClr val="accent1"/>
           </a:effectRef>
           <a:fontRef idx="minor">
@@ -25696,6 +25820,7 @@
           <a:lstStyle/>
           <a:p>
             <a:pPr algn="ctr"/>
+            <a:endParaRPr lang="en-US"/>
           </a:p>
         </p:txBody>
       </p:sp>
@@ -25810,7 +25935,7 @@
           <a:fillRef idx="3">
             <a:schemeClr val="accent1"/>
           </a:fillRef>
-          <a:effectRef idx="2">
+          <a:effectRef idx="0">
             <a:schemeClr val="accent1"/>
           </a:effectRef>
           <a:fontRef idx="minor">
@@ -25822,6 +25947,7 @@
           <a:lstStyle/>
           <a:p>
             <a:pPr algn="ctr"/>
+            <a:endParaRPr lang="en-US"/>
           </a:p>
         </p:txBody>
       </p:sp>
@@ -26430,7 +26556,7 @@
 </file>
 
 <file path=ppt/slides/slide5.xml><?xml version="1.0" encoding="utf-8"?>
-<p:sld xmlns:a="http://schemas.openxmlformats.org/drawingml/2006/main" xmlns:p="http://schemas.openxmlformats.org/presentationml/2006/main" xmlns:r="http://schemas.openxmlformats.org/officeDocument/2006/relationships">
+<p:sld xmlns:a="http://schemas.openxmlformats.org/drawingml/2006/main" xmlns:p="http://schemas.openxmlformats.org/presentationml/2006/main" xmlns:r="http://schemas.openxmlformats.org/officeDocument/2006/relationships" xmlns:m="http://schemas.openxmlformats.org/officeDocument/2006/math" xmlns:a14="http://schemas.microsoft.com/office/drawing/2010/main" xmlns:mc="http://schemas.openxmlformats.org/markup-compatibility/2006" xmlns:w="http://schemas.openxmlformats.org/wordprocessingml/2006/main" mc:Ignorable="a14">
   <p:cSld>
     <p:spTree>
       <p:nvGrpSpPr>
@@ -26468,7 +26594,7 @@
           <a:fillRef idx="3">
             <a:schemeClr val="accent1"/>
           </a:fillRef>
-          <a:effectRef idx="2">
+          <a:effectRef idx="0">
             <a:schemeClr val="accent1"/>
           </a:effectRef>
           <a:fontRef idx="minor">
@@ -26480,6 +26606,7 @@
           <a:lstStyle/>
           <a:p>
             <a:pPr algn="ctr"/>
+            <a:endParaRPr lang="en-US"/>
           </a:p>
         </p:txBody>
       </p:sp>
@@ -26512,7 +26639,7 @@
           <a:fillRef idx="3">
             <a:schemeClr val="accent1"/>
           </a:fillRef>
-          <a:effectRef idx="2">
+          <a:effectRef idx="0">
             <a:schemeClr val="accent1"/>
           </a:effectRef>
           <a:fontRef idx="minor">
@@ -26524,6 +26651,7 @@
           <a:lstStyle/>
           <a:p>
             <a:pPr algn="ctr"/>
+            <a:endParaRPr lang="en-US"/>
           </a:p>
         </p:txBody>
       </p:sp>
@@ -26636,7 +26764,7 @@
           <a:fillRef idx="3">
             <a:schemeClr val="accent1"/>
           </a:fillRef>
-          <a:effectRef idx="2">
+          <a:effectRef idx="0">
             <a:schemeClr val="accent1"/>
           </a:effectRef>
           <a:fontRef idx="minor">
@@ -26648,6 +26776,7 @@
           <a:lstStyle/>
           <a:p>
             <a:pPr algn="ctr"/>
+            <a:endParaRPr lang="en-US"/>
           </a:p>
         </p:txBody>
       </p:sp>
@@ -26684,7 +26813,7 @@
           <a:fillRef idx="3">
             <a:schemeClr val="accent1"/>
           </a:fillRef>
-          <a:effectRef idx="2">
+          <a:effectRef idx="0">
             <a:schemeClr val="accent1"/>
           </a:effectRef>
           <a:fontRef idx="minor">
@@ -26696,6 +26825,7 @@
           <a:lstStyle/>
           <a:p>
             <a:pPr algn="ctr"/>
+            <a:endParaRPr lang="en-US"/>
           </a:p>
         </p:txBody>
       </p:sp>
@@ -26810,7 +26940,7 @@
           <a:fillRef idx="3">
             <a:schemeClr val="accent1"/>
           </a:fillRef>
-          <a:effectRef idx="2">
+          <a:effectRef idx="0">
             <a:schemeClr val="accent1"/>
           </a:effectRef>
           <a:fontRef idx="minor">
@@ -26822,6 +26952,7 @@
           <a:lstStyle/>
           <a:p>
             <a:pPr algn="ctr"/>
+            <a:endParaRPr lang="en-US"/>
           </a:p>
         </p:txBody>
       </p:sp>
@@ -26936,7 +27067,7 @@
           <a:fillRef idx="3">
             <a:schemeClr val="accent1"/>
           </a:fillRef>
-          <a:effectRef idx="2">
+          <a:effectRef idx="0">
             <a:schemeClr val="accent1"/>
           </a:effectRef>
           <a:fontRef idx="minor">
@@ -26948,6 +27079,7 @@
           <a:lstStyle/>
           <a:p>
             <a:pPr algn="ctr"/>
+            <a:endParaRPr lang="en-US"/>
           </a:p>
         </p:txBody>
       </p:sp>
@@ -27062,7 +27194,7 @@
           <a:fillRef idx="3">
             <a:schemeClr val="accent1"/>
           </a:fillRef>
-          <a:effectRef idx="2">
+          <a:effectRef idx="0">
             <a:schemeClr val="accent1"/>
           </a:effectRef>
           <a:fontRef idx="minor">
@@ -27074,6 +27206,7 @@
           <a:lstStyle/>
           <a:p>
             <a:pPr algn="ctr"/>
+            <a:endParaRPr lang="en-US"/>
           </a:p>
         </p:txBody>
       </p:sp>
@@ -27149,7 +27282,7 @@
           <a:fillRef idx="3">
             <a:schemeClr val="accent1"/>
           </a:fillRef>
-          <a:effectRef idx="2">
+          <a:effectRef idx="0">
             <a:schemeClr val="accent1"/>
           </a:effectRef>
           <a:fontRef idx="minor">
@@ -27161,6 +27294,7 @@
           <a:lstStyle/>
           <a:p>
             <a:pPr algn="ctr"/>
+            <a:endParaRPr lang="en-US"/>
           </a:p>
         </p:txBody>
       </p:sp>
@@ -27236,7 +27370,7 @@
           <a:fillRef idx="3">
             <a:schemeClr val="accent1"/>
           </a:fillRef>
-          <a:effectRef idx="2">
+          <a:effectRef idx="0">
             <a:schemeClr val="accent1"/>
           </a:effectRef>
           <a:fontRef idx="minor">
@@ -27248,6 +27382,7 @@
           <a:lstStyle/>
           <a:p>
             <a:pPr algn="ctr"/>
+            <a:endParaRPr lang="en-US"/>
           </a:p>
         </p:txBody>
       </p:sp>
@@ -27323,7 +27458,7 @@
           <a:fillRef idx="3">
             <a:schemeClr val="accent1"/>
           </a:fillRef>
-          <a:effectRef idx="2">
+          <a:effectRef idx="0">
             <a:schemeClr val="accent1"/>
           </a:effectRef>
           <a:fontRef idx="minor">
@@ -27335,6 +27470,7 @@
           <a:lstStyle/>
           <a:p>
             <a:pPr algn="ctr"/>
+            <a:endParaRPr lang="en-US"/>
           </a:p>
         </p:txBody>
       </p:sp>
@@ -27410,7 +27546,7 @@
           <a:fillRef idx="3">
             <a:schemeClr val="accent1"/>
           </a:fillRef>
-          <a:effectRef idx="2">
+          <a:effectRef idx="0">
             <a:schemeClr val="accent1"/>
           </a:effectRef>
           <a:fontRef idx="minor">
@@ -27422,6 +27558,7 @@
           <a:lstStyle/>
           <a:p>
             <a:pPr algn="ctr"/>
+            <a:endParaRPr lang="en-US"/>
           </a:p>
         </p:txBody>
       </p:sp>
@@ -27497,7 +27634,7 @@
           <a:fillRef idx="3">
             <a:schemeClr val="accent1"/>
           </a:fillRef>
-          <a:effectRef idx="2">
+          <a:effectRef idx="0">
             <a:schemeClr val="accent1"/>
           </a:effectRef>
           <a:fontRef idx="minor">
@@ -27509,6 +27646,7 @@
           <a:lstStyle/>
           <a:p>
             <a:pPr algn="ctr"/>
+            <a:endParaRPr lang="en-US"/>
           </a:p>
         </p:txBody>
       </p:sp>
@@ -27584,7 +27722,7 @@
           <a:fillRef idx="3">
             <a:schemeClr val="accent1"/>
           </a:fillRef>
-          <a:effectRef idx="2">
+          <a:effectRef idx="0">
             <a:schemeClr val="accent1"/>
           </a:effectRef>
           <a:fontRef idx="minor">
@@ -27596,6 +27734,7 @@
           <a:lstStyle/>
           <a:p>
             <a:pPr algn="ctr"/>
+            <a:endParaRPr lang="en-US"/>
           </a:p>
         </p:txBody>
       </p:sp>
@@ -28727,7 +28866,7 @@
 </file>
 
 <file path=ppt/slides/slide6.xml><?xml version="1.0" encoding="utf-8"?>
-<p:sld xmlns:a="http://schemas.openxmlformats.org/drawingml/2006/main" xmlns:p="http://schemas.openxmlformats.org/presentationml/2006/main" xmlns:r="http://schemas.openxmlformats.org/officeDocument/2006/relationships">
+<p:sld xmlns:a="http://schemas.openxmlformats.org/drawingml/2006/main" xmlns:p="http://schemas.openxmlformats.org/presentationml/2006/main" xmlns:r="http://schemas.openxmlformats.org/officeDocument/2006/relationships" xmlns:m="http://schemas.openxmlformats.org/officeDocument/2006/math" xmlns:a14="http://schemas.microsoft.com/office/drawing/2010/main" xmlns:mc="http://schemas.openxmlformats.org/markup-compatibility/2006" xmlns:w="http://schemas.openxmlformats.org/wordprocessingml/2006/main" mc:Ignorable="a14">
   <p:cSld>
     <p:spTree>
       <p:nvGrpSpPr>
@@ -28765,7 +28904,7 @@
           <a:fillRef idx="3">
             <a:schemeClr val="accent1"/>
           </a:fillRef>
-          <a:effectRef idx="2">
+          <a:effectRef idx="0">
             <a:schemeClr val="accent1"/>
           </a:effectRef>
           <a:fontRef idx="minor">
@@ -28777,6 +28916,7 @@
           <a:lstStyle/>
           <a:p>
             <a:pPr algn="ctr"/>
+            <a:endParaRPr lang="en-US"/>
           </a:p>
         </p:txBody>
       </p:sp>
@@ -28809,7 +28949,7 @@
           <a:fillRef idx="3">
             <a:schemeClr val="accent1"/>
           </a:fillRef>
-          <a:effectRef idx="2">
+          <a:effectRef idx="0">
             <a:schemeClr val="accent1"/>
           </a:effectRef>
           <a:fontRef idx="minor">
@@ -28821,6 +28961,7 @@
           <a:lstStyle/>
           <a:p>
             <a:pPr algn="ctr"/>
+            <a:endParaRPr lang="en-US"/>
           </a:p>
         </p:txBody>
       </p:sp>
@@ -28933,7 +29074,7 @@
           <a:fillRef idx="3">
             <a:schemeClr val="accent1"/>
           </a:fillRef>
-          <a:effectRef idx="2">
+          <a:effectRef idx="0">
             <a:schemeClr val="accent1"/>
           </a:effectRef>
           <a:fontRef idx="minor">
@@ -28945,6 +29086,7 @@
           <a:lstStyle/>
           <a:p>
             <a:pPr algn="ctr"/>
+            <a:endParaRPr lang="en-US"/>
           </a:p>
         </p:txBody>
       </p:sp>
@@ -28981,7 +29123,7 @@
           <a:fillRef idx="3">
             <a:schemeClr val="accent1"/>
           </a:fillRef>
-          <a:effectRef idx="2">
+          <a:effectRef idx="0">
             <a:schemeClr val="accent1"/>
           </a:effectRef>
           <a:fontRef idx="minor">
@@ -28993,6 +29135,7 @@
           <a:lstStyle/>
           <a:p>
             <a:pPr algn="ctr"/>
+            <a:endParaRPr lang="en-US"/>
           </a:p>
         </p:txBody>
       </p:sp>
@@ -29107,7 +29250,7 @@
           <a:fillRef idx="3">
             <a:schemeClr val="accent1"/>
           </a:fillRef>
-          <a:effectRef idx="2">
+          <a:effectRef idx="0">
             <a:schemeClr val="accent1"/>
           </a:effectRef>
           <a:fontRef idx="minor">
@@ -29119,6 +29262,7 @@
           <a:lstStyle/>
           <a:p>
             <a:pPr algn="ctr"/>
+            <a:endParaRPr lang="en-US"/>
           </a:p>
         </p:txBody>
       </p:sp>
@@ -29233,7 +29377,7 @@
           <a:fillRef idx="3">
             <a:schemeClr val="accent1"/>
           </a:fillRef>
-          <a:effectRef idx="2">
+          <a:effectRef idx="0">
             <a:schemeClr val="accent1"/>
           </a:effectRef>
           <a:fontRef idx="minor">
@@ -29245,6 +29389,7 @@
           <a:lstStyle/>
           <a:p>
             <a:pPr algn="ctr"/>
+            <a:endParaRPr lang="en-US"/>
           </a:p>
         </p:txBody>
       </p:sp>
@@ -29783,7 +29928,7 @@
 </file>
 
 <file path=ppt/slides/slide7.xml><?xml version="1.0" encoding="utf-8"?>
-<p:sld xmlns:a="http://schemas.openxmlformats.org/drawingml/2006/main" xmlns:p="http://schemas.openxmlformats.org/presentationml/2006/main" xmlns:r="http://schemas.openxmlformats.org/officeDocument/2006/relationships">
+<p:sld xmlns:a="http://schemas.openxmlformats.org/drawingml/2006/main" xmlns:p="http://schemas.openxmlformats.org/presentationml/2006/main" xmlns:r="http://schemas.openxmlformats.org/officeDocument/2006/relationships" xmlns:m="http://schemas.openxmlformats.org/officeDocument/2006/math" xmlns:a14="http://schemas.microsoft.com/office/drawing/2010/main" xmlns:mc="http://schemas.openxmlformats.org/markup-compatibility/2006" xmlns:w="http://schemas.openxmlformats.org/wordprocessingml/2006/main" mc:Ignorable="a14">
   <p:cSld>
     <p:spTree>
       <p:nvGrpSpPr>
@@ -29821,7 +29966,7 @@
           <a:fillRef idx="3">
             <a:schemeClr val="accent1"/>
           </a:fillRef>
-          <a:effectRef idx="2">
+          <a:effectRef idx="0">
             <a:schemeClr val="accent1"/>
           </a:effectRef>
           <a:fontRef idx="minor">
@@ -29833,6 +29978,7 @@
           <a:lstStyle/>
           <a:p>
             <a:pPr algn="ctr"/>
+            <a:endParaRPr lang="en-US"/>
           </a:p>
         </p:txBody>
       </p:sp>
@@ -29865,7 +30011,7 @@
           <a:fillRef idx="3">
             <a:schemeClr val="accent1"/>
           </a:fillRef>
-          <a:effectRef idx="2">
+          <a:effectRef idx="0">
             <a:schemeClr val="accent1"/>
           </a:effectRef>
           <a:fontRef idx="minor">
@@ -29877,6 +30023,7 @@
           <a:lstStyle/>
           <a:p>
             <a:pPr algn="ctr"/>
+            <a:endParaRPr lang="en-US"/>
           </a:p>
         </p:txBody>
       </p:sp>
@@ -29989,7 +30136,7 @@
           <a:fillRef idx="3">
             <a:schemeClr val="accent1"/>
           </a:fillRef>
-          <a:effectRef idx="2">
+          <a:effectRef idx="0">
             <a:schemeClr val="accent1"/>
           </a:effectRef>
           <a:fontRef idx="minor">
@@ -30001,6 +30148,7 @@
           <a:lstStyle/>
           <a:p>
             <a:pPr algn="ctr"/>
+            <a:endParaRPr lang="en-US"/>
           </a:p>
         </p:txBody>
       </p:sp>
@@ -30037,7 +30185,7 @@
           <a:fillRef idx="3">
             <a:schemeClr val="accent1"/>
           </a:fillRef>
-          <a:effectRef idx="2">
+          <a:effectRef idx="0">
             <a:schemeClr val="accent1"/>
           </a:effectRef>
           <a:fontRef idx="minor">
@@ -30049,6 +30197,7 @@
           <a:lstStyle/>
           <a:p>
             <a:pPr algn="ctr"/>
+            <a:endParaRPr lang="en-US"/>
           </a:p>
         </p:txBody>
       </p:sp>
@@ -30163,7 +30312,7 @@
           <a:fillRef idx="3">
             <a:schemeClr val="accent1"/>
           </a:fillRef>
-          <a:effectRef idx="2">
+          <a:effectRef idx="0">
             <a:schemeClr val="accent1"/>
           </a:effectRef>
           <a:fontRef idx="minor">
@@ -30175,6 +30324,7 @@
           <a:lstStyle/>
           <a:p>
             <a:pPr algn="ctr"/>
+            <a:endParaRPr lang="en-US"/>
           </a:p>
         </p:txBody>
       </p:sp>
@@ -30289,7 +30439,7 @@
           <a:fillRef idx="3">
             <a:schemeClr val="accent1"/>
           </a:fillRef>
-          <a:effectRef idx="2">
+          <a:effectRef idx="0">
             <a:schemeClr val="accent1"/>
           </a:effectRef>
           <a:fontRef idx="minor">
@@ -30301,6 +30451,7 @@
           <a:lstStyle/>
           <a:p>
             <a:pPr algn="ctr"/>
+            <a:endParaRPr lang="en-US"/>
           </a:p>
         </p:txBody>
       </p:sp>
@@ -30415,7 +30566,7 @@
           <a:fillRef idx="3">
             <a:schemeClr val="accent1"/>
           </a:fillRef>
-          <a:effectRef idx="2">
+          <a:effectRef idx="0">
             <a:schemeClr val="accent1"/>
           </a:effectRef>
           <a:fontRef idx="minor">
@@ -30427,6 +30578,7 @@
           <a:lstStyle/>
           <a:p>
             <a:pPr algn="ctr"/>
+            <a:endParaRPr lang="en-US"/>
           </a:p>
         </p:txBody>
       </p:sp>
@@ -30541,7 +30693,7 @@
           <a:fillRef idx="3">
             <a:schemeClr val="accent1"/>
           </a:fillRef>
-          <a:effectRef idx="2">
+          <a:effectRef idx="0">
             <a:schemeClr val="accent1"/>
           </a:effectRef>
           <a:fontRef idx="minor">
@@ -30553,6 +30705,7 @@
           <a:lstStyle/>
           <a:p>
             <a:pPr algn="ctr"/>
+            <a:endParaRPr lang="en-US"/>
           </a:p>
         </p:txBody>
       </p:sp>
@@ -31233,7 +31386,7 @@
 </file>
 
 <file path=ppt/slides/slide8.xml><?xml version="1.0" encoding="utf-8"?>
-<p:sld xmlns:a="http://schemas.openxmlformats.org/drawingml/2006/main" xmlns:p="http://schemas.openxmlformats.org/presentationml/2006/main" xmlns:r="http://schemas.openxmlformats.org/officeDocument/2006/relationships">
+<p:sld xmlns:a="http://schemas.openxmlformats.org/drawingml/2006/main" xmlns:p="http://schemas.openxmlformats.org/presentationml/2006/main" xmlns:r="http://schemas.openxmlformats.org/officeDocument/2006/relationships" xmlns:m="http://schemas.openxmlformats.org/officeDocument/2006/math" xmlns:a14="http://schemas.microsoft.com/office/drawing/2010/main" xmlns:mc="http://schemas.openxmlformats.org/markup-compatibility/2006" xmlns:w="http://schemas.openxmlformats.org/wordprocessingml/2006/main" mc:Ignorable="a14">
   <p:cSld>
     <p:spTree>
       <p:nvGrpSpPr>
@@ -31271,7 +31424,7 @@
           <a:fillRef idx="3">
             <a:schemeClr val="accent1"/>
           </a:fillRef>
-          <a:effectRef idx="2">
+          <a:effectRef idx="0">
             <a:schemeClr val="accent1"/>
           </a:effectRef>
           <a:fontRef idx="minor">
@@ -31283,6 +31436,7 @@
           <a:lstStyle/>
           <a:p>
             <a:pPr algn="ctr"/>
+            <a:endParaRPr lang="en-US"/>
           </a:p>
         </p:txBody>
       </p:sp>
@@ -31315,7 +31469,7 @@
           <a:fillRef idx="3">
             <a:schemeClr val="accent1"/>
           </a:fillRef>
-          <a:effectRef idx="2">
+          <a:effectRef idx="0">
             <a:schemeClr val="accent1"/>
           </a:effectRef>
           <a:fontRef idx="minor">
@@ -31327,6 +31481,7 @@
           <a:lstStyle/>
           <a:p>
             <a:pPr algn="ctr"/>
+            <a:endParaRPr lang="en-US"/>
           </a:p>
         </p:txBody>
       </p:sp>
@@ -31439,7 +31594,7 @@
           <a:fillRef idx="3">
             <a:schemeClr val="accent1"/>
           </a:fillRef>
-          <a:effectRef idx="2">
+          <a:effectRef idx="0">
             <a:schemeClr val="accent1"/>
           </a:effectRef>
           <a:fontRef idx="minor">
@@ -31451,6 +31606,7 @@
           <a:lstStyle/>
           <a:p>
             <a:pPr algn="ctr"/>
+            <a:endParaRPr lang="en-US"/>
           </a:p>
         </p:txBody>
       </p:sp>
@@ -31487,7 +31643,7 @@
           <a:fillRef idx="3">
             <a:schemeClr val="accent1"/>
           </a:fillRef>
-          <a:effectRef idx="2">
+          <a:effectRef idx="0">
             <a:schemeClr val="accent1"/>
           </a:effectRef>
           <a:fontRef idx="minor">
@@ -31499,6 +31655,7 @@
           <a:lstStyle/>
           <a:p>
             <a:pPr algn="ctr"/>
+            <a:endParaRPr lang="en-US"/>
           </a:p>
         </p:txBody>
       </p:sp>
@@ -31671,7 +31828,7 @@
           <a:fillRef idx="3">
             <a:schemeClr val="accent1"/>
           </a:fillRef>
-          <a:effectRef idx="2">
+          <a:effectRef idx="0">
             <a:schemeClr val="accent1"/>
           </a:effectRef>
           <a:fontRef idx="minor">
@@ -31683,6 +31840,7 @@
           <a:lstStyle/>
           <a:p>
             <a:pPr algn="ctr"/>
+            <a:endParaRPr lang="en-US"/>
           </a:p>
         </p:txBody>
       </p:sp>
@@ -31855,7 +32013,7 @@
           <a:fillRef idx="3">
             <a:schemeClr val="accent1"/>
           </a:fillRef>
-          <a:effectRef idx="2">
+          <a:effectRef idx="0">
             <a:schemeClr val="accent1"/>
           </a:effectRef>
           <a:fontRef idx="minor">
@@ -31867,6 +32025,7 @@
           <a:lstStyle/>
           <a:p>
             <a:pPr algn="ctr"/>
+            <a:endParaRPr lang="en-US"/>
           </a:p>
         </p:txBody>
       </p:sp>
@@ -32516,7 +32675,7 @@
 </file>
 
 <file path=ppt/slides/slide9.xml><?xml version="1.0" encoding="utf-8"?>
-<p:sld xmlns:a="http://schemas.openxmlformats.org/drawingml/2006/main" xmlns:p="http://schemas.openxmlformats.org/presentationml/2006/main" xmlns:r="http://schemas.openxmlformats.org/officeDocument/2006/relationships">
+<p:sld xmlns:a="http://schemas.openxmlformats.org/drawingml/2006/main" xmlns:p="http://schemas.openxmlformats.org/presentationml/2006/main" xmlns:r="http://schemas.openxmlformats.org/officeDocument/2006/relationships" xmlns:m="http://schemas.openxmlformats.org/officeDocument/2006/math" xmlns:a14="http://schemas.microsoft.com/office/drawing/2010/main" xmlns:mc="http://schemas.openxmlformats.org/markup-compatibility/2006" xmlns:w="http://schemas.openxmlformats.org/wordprocessingml/2006/main" mc:Ignorable="a14">
   <p:cSld>
     <p:spTree>
       <p:nvGrpSpPr>
@@ -32554,7 +32713,7 @@
           <a:fillRef idx="3">
             <a:schemeClr val="accent1"/>
           </a:fillRef>
-          <a:effectRef idx="2">
+          <a:effectRef idx="0">
             <a:schemeClr val="accent1"/>
           </a:effectRef>
           <a:fontRef idx="minor">
@@ -32566,6 +32725,7 @@
           <a:lstStyle/>
           <a:p>
             <a:pPr algn="ctr"/>
+            <a:endParaRPr lang="en-US"/>
           </a:p>
         </p:txBody>
       </p:sp>
@@ -32598,7 +32758,7 @@
           <a:fillRef idx="3">
             <a:schemeClr val="accent1"/>
           </a:fillRef>
-          <a:effectRef idx="2">
+          <a:effectRef idx="0">
             <a:schemeClr val="accent1"/>
           </a:effectRef>
           <a:fontRef idx="minor">
@@ -32610,6 +32770,7 @@
           <a:lstStyle/>
           <a:p>
             <a:pPr algn="ctr"/>
+            <a:endParaRPr lang="en-US"/>
           </a:p>
         </p:txBody>
       </p:sp>
@@ -32722,7 +32883,7 @@
           <a:fillRef idx="3">
             <a:schemeClr val="accent1"/>
           </a:fillRef>
-          <a:effectRef idx="2">
+          <a:effectRef idx="0">
             <a:schemeClr val="accent1"/>
           </a:effectRef>
           <a:fontRef idx="minor">
@@ -32734,6 +32895,7 @@
           <a:lstStyle/>
           <a:p>
             <a:pPr algn="ctr"/>
+            <a:endParaRPr lang="en-US"/>
           </a:p>
         </p:txBody>
       </p:sp>
@@ -32770,7 +32932,7 @@
           <a:fillRef idx="3">
             <a:schemeClr val="accent1"/>
           </a:fillRef>
-          <a:effectRef idx="2">
+          <a:effectRef idx="0">
             <a:schemeClr val="accent1"/>
           </a:effectRef>
           <a:fontRef idx="minor">
@@ -32782,6 +32944,7 @@
           <a:lstStyle/>
           <a:p>
             <a:pPr algn="ctr"/>
+            <a:endParaRPr lang="en-US"/>
           </a:p>
         </p:txBody>
       </p:sp>
@@ -32896,7 +33059,7 @@
           <a:fillRef idx="3">
             <a:schemeClr val="accent1"/>
           </a:fillRef>
-          <a:effectRef idx="2">
+          <a:effectRef idx="0">
             <a:schemeClr val="accent1"/>
           </a:effectRef>
           <a:fontRef idx="minor">
@@ -32908,6 +33071,7 @@
           <a:lstStyle/>
           <a:p>
             <a:pPr algn="ctr"/>
+            <a:endParaRPr lang="en-US"/>
           </a:p>
         </p:txBody>
       </p:sp>
@@ -33022,7 +33186,7 @@
           <a:fillRef idx="3">
             <a:schemeClr val="accent1"/>
           </a:fillRef>
-          <a:effectRef idx="2">
+          <a:effectRef idx="0">
             <a:schemeClr val="accent1"/>
           </a:effectRef>
           <a:fontRef idx="minor">
@@ -33034,6 +33198,7 @@
           <a:lstStyle/>
           <a:p>
             <a:pPr algn="ctr"/>
+            <a:endParaRPr lang="en-US"/>
           </a:p>
         </p:txBody>
       </p:sp>
@@ -33148,7 +33313,7 @@
           <a:fillRef idx="3">
             <a:schemeClr val="accent1"/>
           </a:fillRef>
-          <a:effectRef idx="2">
+          <a:effectRef idx="0">
             <a:schemeClr val="accent1"/>
           </a:effectRef>
           <a:fontRef idx="minor">
@@ -33160,6 +33325,7 @@
           <a:lstStyle/>
           <a:p>
             <a:pPr algn="ctr"/>
+            <a:endParaRPr lang="en-US"/>
           </a:p>
         </p:txBody>
       </p:sp>
@@ -33274,7 +33440,7 @@
           <a:fillRef idx="3">
             <a:schemeClr val="accent1"/>
           </a:fillRef>
-          <a:effectRef idx="2">
+          <a:effectRef idx="0">
             <a:schemeClr val="accent1"/>
           </a:effectRef>
           <a:fontRef idx="minor">
@@ -33286,6 +33452,7 @@
           <a:lstStyle/>
           <a:p>
             <a:pPr algn="ctr"/>
+            <a:endParaRPr lang="en-US"/>
           </a:p>
         </p:txBody>
       </p:sp>
@@ -33400,7 +33567,7 @@
           <a:fillRef idx="3">
             <a:schemeClr val="accent1"/>
           </a:fillRef>
-          <a:effectRef idx="2">
+          <a:effectRef idx="0">
             <a:schemeClr val="accent1"/>
           </a:effectRef>
           <a:fontRef idx="minor">
@@ -33412,6 +33579,7 @@
           <a:lstStyle/>
           <a:p>
             <a:pPr algn="ctr"/>
+            <a:endParaRPr lang="en-US"/>
           </a:p>
         </p:txBody>
       </p:sp>
@@ -33526,7 +33694,7 @@
           <a:fillRef idx="3">
             <a:schemeClr val="accent1"/>
           </a:fillRef>
-          <a:effectRef idx="2">
+          <a:effectRef idx="0">
             <a:schemeClr val="accent1"/>
           </a:effectRef>
           <a:fontRef idx="minor">
@@ -33538,6 +33706,7 @@
           <a:lstStyle/>
           <a:p>
             <a:pPr algn="ctr"/>
+            <a:endParaRPr lang="en-US"/>
           </a:p>
         </p:txBody>
       </p:sp>
